--- a/JellyStack/SpiritStack_발표자료.pptx
+++ b/JellyStack/SpiritStack_발표자료.pptx
@@ -5,11 +5,11 @@
     <p:sldMasterId id="2147483648" r:id="rId1"/>
   </p:sldMasterIdLst>
   <p:notesMasterIdLst>
-    <p:notesMasterId r:id="rId16"/>
+    <p:notesMasterId r:id="rId17"/>
   </p:notesMasterIdLst>
   <p:sldIdLst>
     <p:sldId id="256" r:id="rId2"/>
-    <p:sldId id="257" r:id="rId3"/>
+    <p:sldId id="271" r:id="rId3"/>
     <p:sldId id="258" r:id="rId4"/>
     <p:sldId id="259" r:id="rId5"/>
     <p:sldId id="260" r:id="rId6"/>
@@ -21,7 +21,8 @@
     <p:sldId id="266" r:id="rId12"/>
     <p:sldId id="267" r:id="rId13"/>
     <p:sldId id="268" r:id="rId14"/>
-    <p:sldId id="269" r:id="rId15"/>
+    <p:sldId id="270" r:id="rId15"/>
+    <p:sldId id="269" r:id="rId16"/>
   </p:sldIdLst>
   <p:sldSz cx="12192000" cy="6858000"/>
   <p:notesSz cx="6858000" cy="12192000"/>
@@ -744,6 +745,90 @@
     </p:spTree>
     <p:extLst>
       <p:ext uri="{BB962C8B-B14F-4D97-AF65-F5344CB8AC3E}">
+        <p14:creationId xmlns:p14="http://schemas.microsoft.com/office/powerpoint/2010/main" val="3219078814"/>
+      </p:ext>
+    </p:extLst>
+  </p:cSld>
+  <p:clrMapOvr>
+    <a:masterClrMapping/>
+  </p:clrMapOvr>
+</p:notes>
+</file>
+
+<file path=ppt/notesSlides/notesSlide15.xml><?xml version="1.0" encoding="utf-8"?>
+<p:notes xmlns:a="http://schemas.openxmlformats.org/drawingml/2006/main" xmlns:r="http://schemas.openxmlformats.org/officeDocument/2006/relationships" xmlns:p="http://schemas.openxmlformats.org/presentationml/2006/main">
+  <p:cSld>
+    <p:spTree>
+      <p:nvGrpSpPr>
+        <p:cNvPr id="1" name=""/>
+        <p:cNvGrpSpPr/>
+        <p:nvPr/>
+      </p:nvGrpSpPr>
+      <p:grpSpPr>
+        <a:xfrm>
+          <a:off x="0" y="0"/>
+          <a:ext cx="0" cy="0"/>
+          <a:chOff x="0" y="0"/>
+          <a:chExt cx="0" cy="0"/>
+        </a:xfrm>
+      </p:grpSpPr>
+      <p:sp>
+        <p:nvSpPr>
+          <p:cNvPr id="2" name="Slide Image Placeholder 1"/>
+          <p:cNvSpPr>
+            <a:spLocks noGrp="1" noRot="1" noChangeAspect="1"/>
+          </p:cNvSpPr>
+          <p:nvPr>
+            <p:ph type="sldImg"/>
+          </p:nvPr>
+        </p:nvSpPr>
+        <p:spPr/>
+      </p:sp>
+      <p:sp>
+        <p:nvSpPr>
+          <p:cNvPr id="3" name="Notes Placeholder 2"/>
+          <p:cNvSpPr>
+            <a:spLocks noGrp="1"/>
+          </p:cNvSpPr>
+          <p:nvPr>
+            <p:ph type="body" idx="1"/>
+          </p:nvPr>
+        </p:nvSpPr>
+        <p:spPr/>
+        <p:txBody>
+          <a:bodyPr/>
+          <a:lstStyle/>
+          <a:p>
+            <a:endParaRPr lang="en-US" dirty="0"/>
+          </a:p>
+        </p:txBody>
+      </p:sp>
+      <p:sp>
+        <p:nvSpPr>
+          <p:cNvPr id="4" name="Slide Number Placeholder 3"/>
+          <p:cNvSpPr>
+            <a:spLocks noGrp="1"/>
+          </p:cNvSpPr>
+          <p:nvPr>
+            <p:ph type="sldNum" sz="quarter" idx="10"/>
+          </p:nvPr>
+        </p:nvSpPr>
+        <p:spPr/>
+        <p:txBody>
+          <a:bodyPr/>
+          <a:lstStyle/>
+          <a:p>
+            <a:fld id="{F7021451-1387-4CA6-816F-3879F97B5CBC}" type="slidenum">
+              <a:rPr lang="en-US"/>
+              <a:t>15</a:t>
+            </a:fld>
+            <a:endParaRPr lang="en-US"/>
+          </a:p>
+        </p:txBody>
+      </p:sp>
+    </p:spTree>
+    <p:extLst>
+      <p:ext uri="{BB962C8B-B14F-4D97-AF65-F5344CB8AC3E}">
         <p14:creationId xmlns:p14="http://schemas.microsoft.com/office/powerpoint/2010/main" val="1024086991"/>
       </p:ext>
     </p:extLst>
@@ -828,7 +913,7 @@
     </p:spTree>
     <p:extLst>
       <p:ext uri="{BB962C8B-B14F-4D97-AF65-F5344CB8AC3E}">
-        <p14:creationId xmlns:p14="http://schemas.microsoft.com/office/powerpoint/2010/main" val="1024086991"/>
+        <p14:creationId xmlns:p14="http://schemas.microsoft.com/office/powerpoint/2010/main" val="2494789421"/>
       </p:ext>
     </p:extLst>
   </p:cSld>
@@ -1794,8 +1879,8 @@
         </p:nvSpPr>
         <p:spPr>
           <a:xfrm>
-            <a:off x="0" y="4160520"/>
-            <a:ext cx="12188952" cy="2697480"/>
+            <a:off x="0" y="4773410"/>
+            <a:ext cx="12188952" cy="2084590"/>
           </a:xfrm>
           <a:prstGeom prst="rect">
             <a:avLst/>
@@ -1817,84 +1902,14 @@
       </p:sp>
       <p:sp>
         <p:nvSpPr>
-          <p:cNvPr id="4" name="Shape 1"/>
-          <p:cNvSpPr/>
-          <p:nvPr/>
-        </p:nvSpPr>
-        <p:spPr>
-          <a:xfrm>
-            <a:off x="566928" y="502920"/>
-            <a:ext cx="2743200" cy="457200"/>
-          </a:xfrm>
-          <a:prstGeom prst="roundRect">
-            <a:avLst>
-              <a:gd name="adj" fmla="val 50000"/>
-            </a:avLst>
-          </a:prstGeom>
-          <a:solidFill>
-            <a:srgbClr val="FFFFFF">
-              <a:alpha val="88000"/>
-            </a:srgbClr>
-          </a:solidFill>
-          <a:ln/>
-        </p:spPr>
-        <p:txBody>
-          <a:bodyPr/>
-          <a:lstStyle/>
-          <a:p>
-            <a:endParaRPr lang="ko-KR" altLang="en-US"/>
-          </a:p>
-        </p:txBody>
-      </p:sp>
-      <p:sp>
-        <p:nvSpPr>
-          <p:cNvPr id="5" name="Text 2"/>
-          <p:cNvSpPr/>
-          <p:nvPr/>
-        </p:nvSpPr>
-        <p:spPr>
-          <a:xfrm>
-            <a:off x="566928" y="502920"/>
-            <a:ext cx="2743200" cy="457200"/>
-          </a:xfrm>
-          <a:prstGeom prst="rect">
-            <a:avLst/>
-          </a:prstGeom>
-          <a:noFill/>
-          <a:ln/>
-        </p:spPr>
-        <p:txBody>
-          <a:bodyPr wrap="square" lIns="0" tIns="0" rIns="0" bIns="0" rtlCol="0" anchor="ctr"/>
-          <a:lstStyle/>
-          <a:p>
-            <a:pPr marL="0" indent="0" algn="ctr">
-              <a:buNone/>
-            </a:pPr>
-            <a:r>
-              <a:rPr lang="en-US" sz="1300" b="1" dirty="0">
-                <a:solidFill>
-                  <a:srgbClr val="38492A"/>
-                </a:solidFill>
-                <a:latin typeface="Malgun Gothic" pitchFamily="34" charset="0"/>
-                <a:ea typeface="Malgun Gothic" pitchFamily="34" charset="-122"/>
-                <a:cs typeface="Malgun Gothic" pitchFamily="34" charset="-120"/>
-              </a:rPr>
-              <a:t>게임 프로젝트 발표</a:t>
-            </a:r>
-            <a:endParaRPr lang="en-US" sz="1300" dirty="0"/>
-          </a:p>
-        </p:txBody>
-      </p:sp>
-      <p:sp>
-        <p:nvSpPr>
           <p:cNvPr id="6" name="Text 3"/>
           <p:cNvSpPr/>
           <p:nvPr/>
         </p:nvSpPr>
         <p:spPr>
           <a:xfrm>
-            <a:off x="566928" y="4297680"/>
-            <a:ext cx="10058400" cy="1188720"/>
+            <a:off x="566928" y="4483380"/>
+            <a:ext cx="10058400" cy="1003020"/>
           </a:xfrm>
           <a:prstGeom prst="rect">
             <a:avLst/>
@@ -1916,17 +1931,6 @@
             <a:pPr marL="0" indent="0" algn="l">
               <a:buNone/>
             </a:pPr>
-            <a:r>
-              <a:rPr lang="en-US" sz="6600" b="1" i="1" dirty="0">
-                <a:solidFill>
-                  <a:srgbClr val="FFFFFF"/>
-                </a:solidFill>
-                <a:latin typeface="Georgia" pitchFamily="34" charset="0"/>
-                <a:ea typeface="Georgia" pitchFamily="34" charset="-122"/>
-                <a:cs typeface="Georgia" pitchFamily="34" charset="-120"/>
-              </a:rPr>
-              <a:t>SpiritStack</a:t>
-            </a:r>
             <a:endParaRPr lang="en-US" sz="6600" dirty="0"/>
           </a:p>
         </p:txBody>
@@ -2025,12 +2029,42 @@
                 <a:ea typeface="Malgun Gothic" pitchFamily="34" charset="-122"/>
                 <a:cs typeface="Malgun Gothic" pitchFamily="34" charset="-120"/>
               </a:rPr>
-              <a:t>      |      Build 0.3.0      |      2026. 06</a:t>
+              <a:t>      |      Build 1.0.0</a:t>
             </a:r>
             <a:endParaRPr lang="en-US" sz="1400" dirty="0"/>
           </a:p>
         </p:txBody>
       </p:sp>
+      <p:pic>
+        <p:nvPicPr>
+          <p:cNvPr id="10" name="그림 9" descr="폰트, 그래픽, 타이포그래피, 로고이(가) 표시된 사진&#10;&#10;자동 생성된 설명">
+            <a:extLst>
+              <a:ext uri="{FF2B5EF4-FFF2-40B4-BE49-F238E27FC236}">
+                <a16:creationId xmlns:a16="http://schemas.microsoft.com/office/drawing/2014/main" id="{1C0F649F-12F4-D429-A9F0-C1F883B1022C}"/>
+              </a:ext>
+            </a:extLst>
+          </p:cNvPr>
+          <p:cNvPicPr>
+            <a:picLocks noChangeAspect="1"/>
+          </p:cNvPicPr>
+          <p:nvPr/>
+        </p:nvPicPr>
+        <p:blipFill>
+          <a:blip r:embed="rId4"/>
+          <a:stretch>
+            <a:fillRect/>
+          </a:stretch>
+        </p:blipFill>
+        <p:spPr>
+          <a:xfrm>
+            <a:off x="2934311" y="842799"/>
+            <a:ext cx="5890562" cy="2945281"/>
+          </a:xfrm>
+          <a:prstGeom prst="rect">
+            <a:avLst/>
+          </a:prstGeom>
+        </p:spPr>
+      </p:pic>
     </p:spTree>
   </p:cSld>
   <p:clrMapOvr>
@@ -8333,6 +8367,1276 @@
 
 <file path=ppt/slides/slide14.xml><?xml version="1.0" encoding="utf-8"?>
 <p:sld xmlns:a="http://schemas.openxmlformats.org/drawingml/2006/main" xmlns:r="http://schemas.openxmlformats.org/officeDocument/2006/relationships" xmlns:p="http://schemas.openxmlformats.org/presentationml/2006/main">
+  <p:cSld>
+    <p:spTree>
+      <p:nvGrpSpPr>
+        <p:cNvPr id="1" name=""/>
+        <p:cNvGrpSpPr/>
+        <p:nvPr/>
+      </p:nvGrpSpPr>
+      <p:grpSpPr>
+        <a:xfrm>
+          <a:off x="0" y="0"/>
+          <a:ext cx="0" cy="0"/>
+          <a:chOff x="0" y="0"/>
+          <a:chExt cx="0" cy="0"/>
+        </a:xfrm>
+      </p:grpSpPr>
+      <p:sp>
+        <p:nvSpPr>
+          <p:cNvPr id="2" name="Shape 0"/>
+          <p:cNvSpPr/>
+          <p:nvPr/>
+        </p:nvSpPr>
+        <p:spPr>
+          <a:xfrm>
+            <a:off x="566928" y="457200"/>
+            <a:ext cx="566928" cy="566928"/>
+          </a:xfrm>
+          <a:prstGeom prst="roundRect">
+            <a:avLst>
+              <a:gd name="adj" fmla="val 19355"/>
+            </a:avLst>
+          </a:prstGeom>
+          <a:solidFill>
+            <a:srgbClr val="4A6535"/>
+          </a:solidFill>
+          <a:ln/>
+          <a:effectLst>
+            <a:outerShdw blurRad="88900" dist="38100" dir="5400000" algn="bl" rotWithShape="0">
+              <a:srgbClr val="3A3A2A">
+                <a:alpha val="18000"/>
+              </a:srgbClr>
+            </a:outerShdw>
+          </a:effectLst>
+        </p:spPr>
+        <p:txBody>
+          <a:bodyPr/>
+          <a:lstStyle/>
+          <a:p>
+            <a:endParaRPr lang="ko-KR" altLang="en-US"/>
+          </a:p>
+        </p:txBody>
+      </p:sp>
+      <p:sp>
+        <p:nvSpPr>
+          <p:cNvPr id="3" name="Text 1"/>
+          <p:cNvSpPr/>
+          <p:nvPr/>
+        </p:nvSpPr>
+        <p:spPr>
+          <a:xfrm>
+            <a:off x="566928" y="457200"/>
+            <a:ext cx="566928" cy="566928"/>
+          </a:xfrm>
+          <a:prstGeom prst="rect">
+            <a:avLst/>
+          </a:prstGeom>
+          <a:noFill/>
+          <a:ln/>
+        </p:spPr>
+        <p:txBody>
+          <a:bodyPr wrap="square" lIns="0" tIns="0" rIns="0" bIns="0" rtlCol="0" anchor="ctr"/>
+          <a:lstStyle/>
+          <a:p>
+            <a:pPr marL="0" indent="0" algn="ctr">
+              <a:buNone/>
+            </a:pPr>
+            <a:r>
+              <a:rPr lang="en-US" sz="2200" b="1" dirty="0">
+                <a:solidFill>
+                  <a:srgbClr val="FFFFFF"/>
+                </a:solidFill>
+                <a:latin typeface="Georgia" pitchFamily="34" charset="0"/>
+                <a:ea typeface="Georgia" pitchFamily="34" charset="-122"/>
+                <a:cs typeface="Georgia" pitchFamily="34" charset="-120"/>
+              </a:rPr>
+              <a:t>12</a:t>
+            </a:r>
+            <a:endParaRPr lang="en-US" sz="2200" dirty="0"/>
+          </a:p>
+        </p:txBody>
+      </p:sp>
+      <p:sp>
+        <p:nvSpPr>
+          <p:cNvPr id="4" name="Text 2"/>
+          <p:cNvSpPr/>
+          <p:nvPr/>
+        </p:nvSpPr>
+        <p:spPr>
+          <a:xfrm>
+            <a:off x="1316736" y="457200"/>
+            <a:ext cx="10058400" cy="237744"/>
+          </a:xfrm>
+          <a:prstGeom prst="rect">
+            <a:avLst/>
+          </a:prstGeom>
+          <a:noFill/>
+          <a:ln/>
+        </p:spPr>
+        <p:txBody>
+          <a:bodyPr wrap="square" lIns="0" tIns="0" rIns="0" bIns="0" rtlCol="0" anchor="ctr"/>
+          <a:lstStyle/>
+          <a:p>
+            <a:pPr marL="0" indent="0" algn="l">
+              <a:buNone/>
+            </a:pPr>
+            <a:r>
+              <a:rPr lang="en-US" sz="1150" b="1" kern="0" spc="200" dirty="0">
+                <a:solidFill>
+                  <a:srgbClr val="8FAE55"/>
+                </a:solidFill>
+                <a:latin typeface="Malgun Gothic" pitchFamily="34" charset="0"/>
+                <a:ea typeface="Malgun Gothic" pitchFamily="34" charset="-122"/>
+                <a:cs typeface="Malgun Gothic" pitchFamily="34" charset="-120"/>
+              </a:rPr>
+              <a:t>RETROSPECTIVE · FUTURE WORK</a:t>
+            </a:r>
+            <a:endParaRPr lang="en-US" sz="1150" dirty="0"/>
+          </a:p>
+        </p:txBody>
+      </p:sp>
+      <p:sp>
+        <p:nvSpPr>
+          <p:cNvPr id="5" name="Text 3"/>
+          <p:cNvSpPr/>
+          <p:nvPr/>
+        </p:nvSpPr>
+        <p:spPr>
+          <a:xfrm>
+            <a:off x="1298448" y="658368"/>
+            <a:ext cx="10607040" cy="457200"/>
+          </a:xfrm>
+          <a:prstGeom prst="rect">
+            <a:avLst/>
+          </a:prstGeom>
+          <a:noFill/>
+          <a:ln/>
+        </p:spPr>
+        <p:txBody>
+          <a:bodyPr wrap="square" lIns="0" tIns="0" rIns="0" bIns="0" rtlCol="0" anchor="ctr"/>
+          <a:lstStyle/>
+          <a:p>
+            <a:pPr marL="0" indent="0" algn="l">
+              <a:buNone/>
+            </a:pPr>
+            <a:r>
+              <a:rPr lang="en-US" sz="2700" b="1" dirty="0">
+                <a:solidFill>
+                  <a:srgbClr val="2E3322"/>
+                </a:solidFill>
+                <a:latin typeface="Malgun Gothic" pitchFamily="34" charset="0"/>
+                <a:ea typeface="Malgun Gothic" pitchFamily="34" charset="-122"/>
+                <a:cs typeface="Malgun Gothic" pitchFamily="34" charset="-120"/>
+              </a:rPr>
+              <a:t>아쉬웠던 점 &amp; </a:t>
+            </a:r>
+            <a:r>
+              <a:rPr lang="en-US" sz="2700" b="1" dirty="0" err="1">
+                <a:solidFill>
+                  <a:srgbClr val="2E3322"/>
+                </a:solidFill>
+                <a:latin typeface="Malgun Gothic" pitchFamily="34" charset="0"/>
+                <a:ea typeface="Malgun Gothic" pitchFamily="34" charset="-122"/>
+                <a:cs typeface="Malgun Gothic" pitchFamily="34" charset="-120"/>
+              </a:rPr>
+              <a:t>향후</a:t>
+            </a:r>
+            <a:r>
+              <a:rPr lang="en-US" sz="2700" b="1" dirty="0">
+                <a:solidFill>
+                  <a:srgbClr val="2E3322"/>
+                </a:solidFill>
+                <a:latin typeface="Malgun Gothic" pitchFamily="34" charset="0"/>
+                <a:ea typeface="Malgun Gothic" pitchFamily="34" charset="-122"/>
+                <a:cs typeface="Malgun Gothic" pitchFamily="34" charset="-120"/>
+              </a:rPr>
+              <a:t> </a:t>
+            </a:r>
+            <a:r>
+              <a:rPr lang="ko-KR" altLang="en-US" sz="2700" b="1" dirty="0">
+                <a:solidFill>
+                  <a:srgbClr val="2E3322"/>
+                </a:solidFill>
+                <a:latin typeface="Malgun Gothic" pitchFamily="34" charset="0"/>
+                <a:ea typeface="Malgun Gothic" pitchFamily="34" charset="-122"/>
+                <a:cs typeface="Malgun Gothic" pitchFamily="34" charset="-120"/>
+              </a:rPr>
+              <a:t>추가하고 싶은 것</a:t>
+            </a:r>
+            <a:endParaRPr lang="en-US" sz="2700" dirty="0"/>
+          </a:p>
+        </p:txBody>
+      </p:sp>
+      <p:sp>
+        <p:nvSpPr>
+          <p:cNvPr id="6" name="Shape 4"/>
+          <p:cNvSpPr/>
+          <p:nvPr/>
+        </p:nvSpPr>
+        <p:spPr>
+          <a:xfrm>
+            <a:off x="566928" y="1463040"/>
+            <a:ext cx="5340096" cy="4617720"/>
+          </a:xfrm>
+          <a:prstGeom prst="roundRect">
+            <a:avLst>
+              <a:gd name="adj" fmla="val 2376"/>
+            </a:avLst>
+          </a:prstGeom>
+          <a:solidFill>
+            <a:srgbClr val="FCF8EE"/>
+          </a:solidFill>
+          <a:ln w="12700">
+            <a:solidFill>
+              <a:srgbClr val="C2D0AE"/>
+            </a:solidFill>
+            <a:prstDash val="solid"/>
+          </a:ln>
+          <a:effectLst>
+            <a:outerShdw blurRad="88900" dist="38100" dir="5400000" algn="bl" rotWithShape="0">
+              <a:srgbClr val="3A3A2A">
+                <a:alpha val="18000"/>
+              </a:srgbClr>
+            </a:outerShdw>
+          </a:effectLst>
+        </p:spPr>
+        <p:txBody>
+          <a:bodyPr/>
+          <a:lstStyle/>
+          <a:p>
+            <a:endParaRPr lang="ko-KR" altLang="en-US"/>
+          </a:p>
+        </p:txBody>
+      </p:sp>
+      <p:sp>
+        <p:nvSpPr>
+          <p:cNvPr id="7" name="Shape 5"/>
+          <p:cNvSpPr/>
+          <p:nvPr/>
+        </p:nvSpPr>
+        <p:spPr>
+          <a:xfrm>
+            <a:off x="566928" y="1463040"/>
+            <a:ext cx="5340096" cy="841248"/>
+          </a:xfrm>
+          <a:prstGeom prst="roundRect">
+            <a:avLst>
+              <a:gd name="adj" fmla="val 13043"/>
+            </a:avLst>
+          </a:prstGeom>
+          <a:solidFill>
+            <a:srgbClr val="C2663B"/>
+          </a:solidFill>
+          <a:ln/>
+        </p:spPr>
+        <p:txBody>
+          <a:bodyPr/>
+          <a:lstStyle/>
+          <a:p>
+            <a:endParaRPr lang="ko-KR" altLang="en-US"/>
+          </a:p>
+        </p:txBody>
+      </p:sp>
+      <p:sp>
+        <p:nvSpPr>
+          <p:cNvPr id="8" name="Shape 6"/>
+          <p:cNvSpPr/>
+          <p:nvPr/>
+        </p:nvSpPr>
+        <p:spPr>
+          <a:xfrm>
+            <a:off x="566928" y="1883664"/>
+            <a:ext cx="5340096" cy="420624"/>
+          </a:xfrm>
+          <a:prstGeom prst="rect">
+            <a:avLst/>
+          </a:prstGeom>
+          <a:solidFill>
+            <a:srgbClr val="C2663B"/>
+          </a:solidFill>
+          <a:ln/>
+        </p:spPr>
+        <p:txBody>
+          <a:bodyPr/>
+          <a:lstStyle/>
+          <a:p>
+            <a:endParaRPr lang="ko-KR" altLang="en-US"/>
+          </a:p>
+        </p:txBody>
+      </p:sp>
+      <p:sp>
+        <p:nvSpPr>
+          <p:cNvPr id="9" name="Text 7"/>
+          <p:cNvSpPr/>
+          <p:nvPr/>
+        </p:nvSpPr>
+        <p:spPr>
+          <a:xfrm>
+            <a:off x="886968" y="1591056"/>
+            <a:ext cx="4700016" cy="384048"/>
+          </a:xfrm>
+          <a:prstGeom prst="rect">
+            <a:avLst/>
+          </a:prstGeom>
+          <a:noFill/>
+          <a:ln/>
+        </p:spPr>
+        <p:txBody>
+          <a:bodyPr wrap="square" lIns="0" tIns="0" rIns="0" bIns="0" rtlCol="0" anchor="ctr"/>
+          <a:lstStyle/>
+          <a:p>
+            <a:pPr marL="0" indent="0" algn="l">
+              <a:buNone/>
+            </a:pPr>
+            <a:r>
+              <a:rPr lang="en-US" sz="1800" b="1" dirty="0">
+                <a:solidFill>
+                  <a:srgbClr val="FFFFFF"/>
+                </a:solidFill>
+                <a:latin typeface="Malgun Gothic" pitchFamily="34" charset="0"/>
+                <a:ea typeface="Malgun Gothic" pitchFamily="34" charset="-122"/>
+                <a:cs typeface="Malgun Gothic" pitchFamily="34" charset="-120"/>
+              </a:rPr>
+              <a:t>아쉬웠던 점</a:t>
+            </a:r>
+            <a:endParaRPr lang="en-US" sz="1800" dirty="0"/>
+          </a:p>
+        </p:txBody>
+      </p:sp>
+      <p:sp>
+        <p:nvSpPr>
+          <p:cNvPr id="10" name="Text 8"/>
+          <p:cNvSpPr/>
+          <p:nvPr/>
+        </p:nvSpPr>
+        <p:spPr>
+          <a:xfrm>
+            <a:off x="886968" y="1965960"/>
+            <a:ext cx="4700016" cy="274320"/>
+          </a:xfrm>
+          <a:prstGeom prst="rect">
+            <a:avLst/>
+          </a:prstGeom>
+          <a:noFill/>
+          <a:ln/>
+        </p:spPr>
+        <p:txBody>
+          <a:bodyPr wrap="square" lIns="0" tIns="0" rIns="0" bIns="0" rtlCol="0" anchor="ctr"/>
+          <a:lstStyle/>
+          <a:p>
+            <a:pPr marL="0" indent="0" algn="l">
+              <a:buNone/>
+            </a:pPr>
+            <a:r>
+              <a:rPr lang="en-US" sz="1100" i="1" dirty="0">
+                <a:solidFill>
+                  <a:srgbClr val="F3EBD6"/>
+                </a:solidFill>
+                <a:latin typeface="Georgia" pitchFamily="34" charset="0"/>
+                <a:ea typeface="Georgia" pitchFamily="34" charset="-122"/>
+                <a:cs typeface="Georgia" pitchFamily="34" charset="-120"/>
+              </a:rPr>
+              <a:t>Lessons Learned</a:t>
+            </a:r>
+            <a:endParaRPr lang="en-US" sz="1100" dirty="0"/>
+          </a:p>
+        </p:txBody>
+      </p:sp>
+      <p:sp>
+        <p:nvSpPr>
+          <p:cNvPr id="11" name="Shape 9"/>
+          <p:cNvSpPr/>
+          <p:nvPr/>
+        </p:nvSpPr>
+        <p:spPr>
+          <a:xfrm>
+            <a:off x="859536" y="2505456"/>
+            <a:ext cx="457200" cy="457200"/>
+          </a:xfrm>
+          <a:prstGeom prst="ellipse">
+            <a:avLst/>
+          </a:prstGeom>
+          <a:solidFill>
+            <a:srgbClr val="C2663B"/>
+          </a:solidFill>
+          <a:ln/>
+        </p:spPr>
+        <p:txBody>
+          <a:bodyPr/>
+          <a:lstStyle/>
+          <a:p>
+            <a:endParaRPr lang="ko-KR" altLang="en-US"/>
+          </a:p>
+        </p:txBody>
+      </p:sp>
+      <p:sp>
+        <p:nvSpPr>
+          <p:cNvPr id="12" name="Text 10"/>
+          <p:cNvSpPr/>
+          <p:nvPr/>
+        </p:nvSpPr>
+        <p:spPr>
+          <a:xfrm>
+            <a:off x="859536" y="2505456"/>
+            <a:ext cx="457200" cy="457200"/>
+          </a:xfrm>
+          <a:prstGeom prst="rect">
+            <a:avLst/>
+          </a:prstGeom>
+          <a:noFill/>
+          <a:ln/>
+        </p:spPr>
+        <p:txBody>
+          <a:bodyPr wrap="square" lIns="0" tIns="0" rIns="0" bIns="0" rtlCol="0" anchor="ctr"/>
+          <a:lstStyle/>
+          <a:p>
+            <a:pPr marL="0" indent="0" algn="ctr">
+              <a:buNone/>
+            </a:pPr>
+            <a:r>
+              <a:rPr lang="en-US" sz="1500" b="1" dirty="0">
+                <a:solidFill>
+                  <a:srgbClr val="FFFFFF"/>
+                </a:solidFill>
+                <a:latin typeface="Georgia" pitchFamily="34" charset="0"/>
+                <a:ea typeface="Georgia" pitchFamily="34" charset="-122"/>
+                <a:cs typeface="Georgia" pitchFamily="34" charset="-120"/>
+              </a:rPr>
+              <a:t>1</a:t>
+            </a:r>
+            <a:endParaRPr lang="en-US" sz="1500" dirty="0"/>
+          </a:p>
+        </p:txBody>
+      </p:sp>
+      <p:sp>
+        <p:nvSpPr>
+          <p:cNvPr id="13" name="Text 11"/>
+          <p:cNvSpPr/>
+          <p:nvPr/>
+        </p:nvSpPr>
+        <p:spPr>
+          <a:xfrm>
+            <a:off x="1481328" y="2468880"/>
+            <a:ext cx="4197096" cy="365760"/>
+          </a:xfrm>
+          <a:prstGeom prst="rect">
+            <a:avLst/>
+          </a:prstGeom>
+          <a:noFill/>
+          <a:ln/>
+        </p:spPr>
+        <p:txBody>
+          <a:bodyPr wrap="square" lIns="0" tIns="0" rIns="0" bIns="0" rtlCol="0" anchor="ctr"/>
+          <a:lstStyle/>
+          <a:p>
+            <a:pPr marL="0" indent="0" algn="l">
+              <a:buNone/>
+            </a:pPr>
+            <a:r>
+              <a:rPr lang="en-US" sz="1450" b="1" dirty="0">
+                <a:solidFill>
+                  <a:srgbClr val="2E3322"/>
+                </a:solidFill>
+                <a:latin typeface="Malgun Gothic" pitchFamily="34" charset="0"/>
+                <a:ea typeface="Malgun Gothic" pitchFamily="34" charset="-122"/>
+                <a:cs typeface="Malgun Gothic" pitchFamily="34" charset="-120"/>
+              </a:rPr>
+              <a:t>데이터 외부 연동 부재</a:t>
+            </a:r>
+            <a:endParaRPr lang="en-US" sz="1450" dirty="0"/>
+          </a:p>
+        </p:txBody>
+      </p:sp>
+      <p:sp>
+        <p:nvSpPr>
+          <p:cNvPr id="14" name="Text 12"/>
+          <p:cNvSpPr/>
+          <p:nvPr/>
+        </p:nvSpPr>
+        <p:spPr>
+          <a:xfrm>
+            <a:off x="1481328" y="2852928"/>
+            <a:ext cx="4151376" cy="749808"/>
+          </a:xfrm>
+          <a:prstGeom prst="rect">
+            <a:avLst/>
+          </a:prstGeom>
+          <a:noFill/>
+          <a:ln/>
+        </p:spPr>
+        <p:txBody>
+          <a:bodyPr wrap="square" lIns="0" tIns="0" rIns="0" bIns="0" rtlCol="0" anchor="t"/>
+          <a:lstStyle/>
+          <a:p>
+            <a:pPr marL="0" indent="0" algn="l">
+              <a:buNone/>
+            </a:pPr>
+            <a:r>
+              <a:rPr lang="en-US" sz="1200" dirty="0">
+                <a:solidFill>
+                  <a:srgbClr val="6B6A50"/>
+                </a:solidFill>
+                <a:latin typeface="Malgun Gothic" pitchFamily="34" charset="0"/>
+                <a:ea typeface="Malgun Gothic" pitchFamily="34" charset="-122"/>
+                <a:cs typeface="Malgun Gothic" pitchFamily="34" charset="-120"/>
+              </a:rPr>
+              <a:t>초반에 CSV·구글 시트를 연동했다면, 협업 시 밸런스 수치 조정이 훨씬 편했을 것.</a:t>
+            </a:r>
+            <a:endParaRPr lang="en-US" sz="1200" dirty="0"/>
+          </a:p>
+        </p:txBody>
+      </p:sp>
+      <p:sp>
+        <p:nvSpPr>
+          <p:cNvPr id="15" name="Shape 13"/>
+          <p:cNvSpPr/>
+          <p:nvPr/>
+        </p:nvSpPr>
+        <p:spPr>
+          <a:xfrm>
+            <a:off x="859536" y="3712464"/>
+            <a:ext cx="457200" cy="457200"/>
+          </a:xfrm>
+          <a:prstGeom prst="ellipse">
+            <a:avLst/>
+          </a:prstGeom>
+          <a:solidFill>
+            <a:srgbClr val="C2663B"/>
+          </a:solidFill>
+          <a:ln/>
+        </p:spPr>
+        <p:txBody>
+          <a:bodyPr/>
+          <a:lstStyle/>
+          <a:p>
+            <a:endParaRPr lang="ko-KR" altLang="en-US"/>
+          </a:p>
+        </p:txBody>
+      </p:sp>
+      <p:sp>
+        <p:nvSpPr>
+          <p:cNvPr id="16" name="Text 14"/>
+          <p:cNvSpPr/>
+          <p:nvPr/>
+        </p:nvSpPr>
+        <p:spPr>
+          <a:xfrm>
+            <a:off x="859536" y="3712464"/>
+            <a:ext cx="457200" cy="457200"/>
+          </a:xfrm>
+          <a:prstGeom prst="rect">
+            <a:avLst/>
+          </a:prstGeom>
+          <a:noFill/>
+          <a:ln/>
+        </p:spPr>
+        <p:txBody>
+          <a:bodyPr wrap="square" lIns="0" tIns="0" rIns="0" bIns="0" rtlCol="0" anchor="ctr"/>
+          <a:lstStyle/>
+          <a:p>
+            <a:pPr marL="0" indent="0" algn="ctr">
+              <a:buNone/>
+            </a:pPr>
+            <a:r>
+              <a:rPr lang="en-US" sz="1500" b="1" dirty="0">
+                <a:solidFill>
+                  <a:srgbClr val="FFFFFF"/>
+                </a:solidFill>
+                <a:latin typeface="Georgia" pitchFamily="34" charset="0"/>
+                <a:ea typeface="Georgia" pitchFamily="34" charset="-122"/>
+                <a:cs typeface="Georgia" pitchFamily="34" charset="-120"/>
+              </a:rPr>
+              <a:t>2</a:t>
+            </a:r>
+            <a:endParaRPr lang="en-US" sz="1500" dirty="0"/>
+          </a:p>
+        </p:txBody>
+      </p:sp>
+      <p:sp>
+        <p:nvSpPr>
+          <p:cNvPr id="17" name="Text 15"/>
+          <p:cNvSpPr/>
+          <p:nvPr/>
+        </p:nvSpPr>
+        <p:spPr>
+          <a:xfrm>
+            <a:off x="1481328" y="3675888"/>
+            <a:ext cx="4197096" cy="365760"/>
+          </a:xfrm>
+          <a:prstGeom prst="rect">
+            <a:avLst/>
+          </a:prstGeom>
+          <a:noFill/>
+          <a:ln/>
+        </p:spPr>
+        <p:txBody>
+          <a:bodyPr wrap="square" lIns="0" tIns="0" rIns="0" bIns="0" rtlCol="0" anchor="ctr"/>
+          <a:lstStyle/>
+          <a:p>
+            <a:pPr marL="0" indent="0" algn="l">
+              <a:buNone/>
+            </a:pPr>
+            <a:r>
+              <a:rPr lang="en-US" sz="1450" b="1" dirty="0">
+                <a:solidFill>
+                  <a:srgbClr val="2E3322"/>
+                </a:solidFill>
+                <a:latin typeface="Malgun Gothic" pitchFamily="34" charset="0"/>
+                <a:ea typeface="Malgun Gothic" pitchFamily="34" charset="-122"/>
+                <a:cs typeface="Malgun Gothic" pitchFamily="34" charset="-120"/>
+              </a:rPr>
+              <a:t>로컬라이징 미고려</a:t>
+            </a:r>
+            <a:endParaRPr lang="en-US" sz="1450" dirty="0"/>
+          </a:p>
+        </p:txBody>
+      </p:sp>
+      <p:sp>
+        <p:nvSpPr>
+          <p:cNvPr id="18" name="Text 16"/>
+          <p:cNvSpPr/>
+          <p:nvPr/>
+        </p:nvSpPr>
+        <p:spPr>
+          <a:xfrm>
+            <a:off x="1481328" y="4059936"/>
+            <a:ext cx="4151376" cy="749808"/>
+          </a:xfrm>
+          <a:prstGeom prst="rect">
+            <a:avLst/>
+          </a:prstGeom>
+          <a:noFill/>
+          <a:ln/>
+        </p:spPr>
+        <p:txBody>
+          <a:bodyPr wrap="square" lIns="0" tIns="0" rIns="0" bIns="0" rtlCol="0" anchor="t"/>
+          <a:lstStyle/>
+          <a:p>
+            <a:pPr marL="0" indent="0" algn="l">
+              <a:buNone/>
+            </a:pPr>
+            <a:r>
+              <a:rPr lang="en-US" sz="1200" dirty="0">
+                <a:solidFill>
+                  <a:srgbClr val="6B6A50"/>
+                </a:solidFill>
+                <a:latin typeface="Malgun Gothic" pitchFamily="34" charset="0"/>
+                <a:ea typeface="Malgun Gothic" pitchFamily="34" charset="-122"/>
+                <a:cs typeface="Malgun Gothic" pitchFamily="34" charset="-120"/>
+              </a:rPr>
+              <a:t>텍스트를 스트링 테이블로 분리하지 않아, 다국어(로컬라이징) 확장을 초기에 고려하지 못함.</a:t>
+            </a:r>
+            <a:endParaRPr lang="en-US" sz="1200" dirty="0"/>
+          </a:p>
+        </p:txBody>
+      </p:sp>
+      <p:sp>
+        <p:nvSpPr>
+          <p:cNvPr id="20" name="Text 18"/>
+          <p:cNvSpPr/>
+          <p:nvPr/>
+        </p:nvSpPr>
+        <p:spPr>
+          <a:xfrm>
+            <a:off x="859536" y="4919472"/>
+            <a:ext cx="457200" cy="457200"/>
+          </a:xfrm>
+          <a:prstGeom prst="rect">
+            <a:avLst/>
+          </a:prstGeom>
+          <a:noFill/>
+          <a:ln/>
+        </p:spPr>
+        <p:txBody>
+          <a:bodyPr wrap="square" lIns="0" tIns="0" rIns="0" bIns="0" rtlCol="0" anchor="ctr"/>
+          <a:lstStyle/>
+          <a:p>
+            <a:pPr marL="0" indent="0" algn="ctr">
+              <a:buNone/>
+            </a:pPr>
+            <a:r>
+              <a:rPr lang="en-US" sz="1500" b="1" dirty="0">
+                <a:solidFill>
+                  <a:srgbClr val="FFFFFF"/>
+                </a:solidFill>
+                <a:latin typeface="Georgia" pitchFamily="34" charset="0"/>
+                <a:ea typeface="Georgia" pitchFamily="34" charset="-122"/>
+                <a:cs typeface="Georgia" pitchFamily="34" charset="-120"/>
+              </a:rPr>
+              <a:t>3</a:t>
+            </a:r>
+            <a:endParaRPr lang="en-US" sz="1500" dirty="0"/>
+          </a:p>
+        </p:txBody>
+      </p:sp>
+      <p:sp>
+        <p:nvSpPr>
+          <p:cNvPr id="23" name="Shape 21"/>
+          <p:cNvSpPr/>
+          <p:nvPr/>
+        </p:nvSpPr>
+        <p:spPr>
+          <a:xfrm>
+            <a:off x="6181344" y="1463040"/>
+            <a:ext cx="5340096" cy="4617720"/>
+          </a:xfrm>
+          <a:prstGeom prst="roundRect">
+            <a:avLst>
+              <a:gd name="adj" fmla="val 2376"/>
+            </a:avLst>
+          </a:prstGeom>
+          <a:solidFill>
+            <a:srgbClr val="FCF8EE"/>
+          </a:solidFill>
+          <a:ln w="12700">
+            <a:solidFill>
+              <a:srgbClr val="C2D0AE"/>
+            </a:solidFill>
+            <a:prstDash val="solid"/>
+          </a:ln>
+          <a:effectLst>
+            <a:outerShdw blurRad="88900" dist="38100" dir="5400000" algn="bl" rotWithShape="0">
+              <a:srgbClr val="3A3A2A">
+                <a:alpha val="18000"/>
+              </a:srgbClr>
+            </a:outerShdw>
+          </a:effectLst>
+        </p:spPr>
+        <p:txBody>
+          <a:bodyPr/>
+          <a:lstStyle/>
+          <a:p>
+            <a:endParaRPr lang="ko-KR" altLang="en-US"/>
+          </a:p>
+        </p:txBody>
+      </p:sp>
+      <p:sp>
+        <p:nvSpPr>
+          <p:cNvPr id="24" name="Shape 22"/>
+          <p:cNvSpPr/>
+          <p:nvPr/>
+        </p:nvSpPr>
+        <p:spPr>
+          <a:xfrm>
+            <a:off x="6181344" y="1463040"/>
+            <a:ext cx="5340096" cy="841248"/>
+          </a:xfrm>
+          <a:prstGeom prst="roundRect">
+            <a:avLst>
+              <a:gd name="adj" fmla="val 13043"/>
+            </a:avLst>
+          </a:prstGeom>
+          <a:solidFill>
+            <a:srgbClr val="4A6535"/>
+          </a:solidFill>
+          <a:ln/>
+        </p:spPr>
+        <p:txBody>
+          <a:bodyPr/>
+          <a:lstStyle/>
+          <a:p>
+            <a:endParaRPr lang="ko-KR" altLang="en-US"/>
+          </a:p>
+        </p:txBody>
+      </p:sp>
+      <p:sp>
+        <p:nvSpPr>
+          <p:cNvPr id="25" name="Shape 23"/>
+          <p:cNvSpPr/>
+          <p:nvPr/>
+        </p:nvSpPr>
+        <p:spPr>
+          <a:xfrm>
+            <a:off x="6181344" y="1883664"/>
+            <a:ext cx="5340096" cy="420624"/>
+          </a:xfrm>
+          <a:prstGeom prst="rect">
+            <a:avLst/>
+          </a:prstGeom>
+          <a:solidFill>
+            <a:srgbClr val="4A6535"/>
+          </a:solidFill>
+          <a:ln/>
+        </p:spPr>
+        <p:txBody>
+          <a:bodyPr/>
+          <a:lstStyle/>
+          <a:p>
+            <a:endParaRPr lang="ko-KR" altLang="en-US"/>
+          </a:p>
+        </p:txBody>
+      </p:sp>
+      <p:sp>
+        <p:nvSpPr>
+          <p:cNvPr id="26" name="Text 24"/>
+          <p:cNvSpPr/>
+          <p:nvPr/>
+        </p:nvSpPr>
+        <p:spPr>
+          <a:xfrm>
+            <a:off x="6501384" y="1591056"/>
+            <a:ext cx="4700016" cy="384048"/>
+          </a:xfrm>
+          <a:prstGeom prst="rect">
+            <a:avLst/>
+          </a:prstGeom>
+          <a:noFill/>
+          <a:ln/>
+        </p:spPr>
+        <p:txBody>
+          <a:bodyPr wrap="square" lIns="0" tIns="0" rIns="0" bIns="0" rtlCol="0" anchor="ctr"/>
+          <a:lstStyle/>
+          <a:p>
+            <a:pPr marL="0" indent="0" algn="l">
+              <a:buNone/>
+            </a:pPr>
+            <a:r>
+              <a:rPr lang="en-US" sz="1800" b="1" dirty="0">
+                <a:solidFill>
+                  <a:srgbClr val="FFFFFF"/>
+                </a:solidFill>
+                <a:latin typeface="Malgun Gothic" pitchFamily="34" charset="0"/>
+                <a:ea typeface="Malgun Gothic" pitchFamily="34" charset="-122"/>
+                <a:cs typeface="Malgun Gothic" pitchFamily="34" charset="-120"/>
+              </a:rPr>
+              <a:t>향후 추가하고 싶은 것</a:t>
+            </a:r>
+            <a:endParaRPr lang="en-US" sz="1800" dirty="0"/>
+          </a:p>
+        </p:txBody>
+      </p:sp>
+      <p:sp>
+        <p:nvSpPr>
+          <p:cNvPr id="27" name="Text 25"/>
+          <p:cNvSpPr/>
+          <p:nvPr/>
+        </p:nvSpPr>
+        <p:spPr>
+          <a:xfrm>
+            <a:off x="6501384" y="1965960"/>
+            <a:ext cx="4700016" cy="274320"/>
+          </a:xfrm>
+          <a:prstGeom prst="rect">
+            <a:avLst/>
+          </a:prstGeom>
+          <a:noFill/>
+          <a:ln/>
+        </p:spPr>
+        <p:txBody>
+          <a:bodyPr wrap="square" lIns="0" tIns="0" rIns="0" bIns="0" rtlCol="0" anchor="ctr"/>
+          <a:lstStyle/>
+          <a:p>
+            <a:pPr marL="0" indent="0" algn="l">
+              <a:buNone/>
+            </a:pPr>
+            <a:r>
+              <a:rPr lang="en-US" sz="1100" i="1" dirty="0">
+                <a:solidFill>
+                  <a:srgbClr val="F3EBD6"/>
+                </a:solidFill>
+                <a:latin typeface="Georgia" pitchFamily="34" charset="0"/>
+                <a:ea typeface="Georgia" pitchFamily="34" charset="-122"/>
+                <a:cs typeface="Georgia" pitchFamily="34" charset="-120"/>
+              </a:rPr>
+              <a:t>Future Work</a:t>
+            </a:r>
+            <a:endParaRPr lang="en-US" sz="1100" dirty="0"/>
+          </a:p>
+        </p:txBody>
+      </p:sp>
+      <p:sp>
+        <p:nvSpPr>
+          <p:cNvPr id="28" name="Shape 26"/>
+          <p:cNvSpPr/>
+          <p:nvPr/>
+        </p:nvSpPr>
+        <p:spPr>
+          <a:xfrm>
+            <a:off x="6473952" y="2505456"/>
+            <a:ext cx="457200" cy="457200"/>
+          </a:xfrm>
+          <a:prstGeom prst="ellipse">
+            <a:avLst/>
+          </a:prstGeom>
+          <a:solidFill>
+            <a:srgbClr val="8FAE55"/>
+          </a:solidFill>
+          <a:ln/>
+        </p:spPr>
+        <p:txBody>
+          <a:bodyPr/>
+          <a:lstStyle/>
+          <a:p>
+            <a:endParaRPr lang="ko-KR" altLang="en-US"/>
+          </a:p>
+        </p:txBody>
+      </p:sp>
+      <p:sp>
+        <p:nvSpPr>
+          <p:cNvPr id="29" name="Text 27"/>
+          <p:cNvSpPr/>
+          <p:nvPr/>
+        </p:nvSpPr>
+        <p:spPr>
+          <a:xfrm>
+            <a:off x="6473952" y="2505456"/>
+            <a:ext cx="457200" cy="457200"/>
+          </a:xfrm>
+          <a:prstGeom prst="rect">
+            <a:avLst/>
+          </a:prstGeom>
+          <a:noFill/>
+          <a:ln/>
+        </p:spPr>
+        <p:txBody>
+          <a:bodyPr wrap="square" lIns="0" tIns="0" rIns="0" bIns="0" rtlCol="0" anchor="ctr"/>
+          <a:lstStyle/>
+          <a:p>
+            <a:pPr marL="0" indent="0" algn="ctr">
+              <a:buNone/>
+            </a:pPr>
+            <a:r>
+              <a:rPr lang="en-US" sz="1500" b="1" dirty="0">
+                <a:solidFill>
+                  <a:srgbClr val="FFFFFF"/>
+                </a:solidFill>
+                <a:latin typeface="Georgia" pitchFamily="34" charset="0"/>
+                <a:ea typeface="Georgia" pitchFamily="34" charset="-122"/>
+                <a:cs typeface="Georgia" pitchFamily="34" charset="-120"/>
+              </a:rPr>
+              <a:t>1</a:t>
+            </a:r>
+            <a:endParaRPr lang="en-US" sz="1500" dirty="0"/>
+          </a:p>
+        </p:txBody>
+      </p:sp>
+      <p:sp>
+        <p:nvSpPr>
+          <p:cNvPr id="30" name="Text 28"/>
+          <p:cNvSpPr/>
+          <p:nvPr/>
+        </p:nvSpPr>
+        <p:spPr>
+          <a:xfrm>
+            <a:off x="7095744" y="2468880"/>
+            <a:ext cx="4197096" cy="365760"/>
+          </a:xfrm>
+          <a:prstGeom prst="rect">
+            <a:avLst/>
+          </a:prstGeom>
+          <a:noFill/>
+          <a:ln/>
+        </p:spPr>
+        <p:txBody>
+          <a:bodyPr wrap="square" lIns="0" tIns="0" rIns="0" bIns="0" rtlCol="0" anchor="ctr"/>
+          <a:lstStyle/>
+          <a:p>
+            <a:pPr marL="0" indent="0" algn="l">
+              <a:buNone/>
+            </a:pPr>
+            <a:r>
+              <a:rPr lang="en-US" sz="1450" b="1" dirty="0">
+                <a:solidFill>
+                  <a:srgbClr val="2E3322"/>
+                </a:solidFill>
+                <a:latin typeface="Malgun Gothic" pitchFamily="34" charset="0"/>
+                <a:ea typeface="Malgun Gothic" pitchFamily="34" charset="-122"/>
+                <a:cs typeface="Malgun Gothic" pitchFamily="34" charset="-120"/>
+              </a:rPr>
+              <a:t>지역 이동 · 포탈 탐험</a:t>
+            </a:r>
+            <a:endParaRPr lang="en-US" sz="1450" dirty="0"/>
+          </a:p>
+        </p:txBody>
+      </p:sp>
+      <p:sp>
+        <p:nvSpPr>
+          <p:cNvPr id="31" name="Text 29"/>
+          <p:cNvSpPr/>
+          <p:nvPr/>
+        </p:nvSpPr>
+        <p:spPr>
+          <a:xfrm>
+            <a:off x="7095744" y="2852928"/>
+            <a:ext cx="4151376" cy="749808"/>
+          </a:xfrm>
+          <a:prstGeom prst="rect">
+            <a:avLst/>
+          </a:prstGeom>
+          <a:noFill/>
+          <a:ln/>
+        </p:spPr>
+        <p:txBody>
+          <a:bodyPr wrap="square" lIns="0" tIns="0" rIns="0" bIns="0" rtlCol="0" anchor="t"/>
+          <a:lstStyle/>
+          <a:p>
+            <a:pPr marL="0" indent="0" algn="l">
+              <a:buNone/>
+            </a:pPr>
+            <a:r>
+              <a:rPr lang="en-US" sz="1200" dirty="0">
+                <a:solidFill>
+                  <a:srgbClr val="6B6A50"/>
+                </a:solidFill>
+                <a:latin typeface="Malgun Gothic" pitchFamily="34" charset="0"/>
+                <a:ea typeface="Malgun Gothic" pitchFamily="34" charset="-122"/>
+                <a:cs typeface="Malgun Gothic" pitchFamily="34" charset="-120"/>
+              </a:rPr>
+              <a:t>레퍼런스(Stacklands)에서 재밌었던 요소 — 포탈로 다른 지역에 가서 탐험하는 콘텐츠.</a:t>
+            </a:r>
+            <a:endParaRPr lang="en-US" sz="1200" dirty="0"/>
+          </a:p>
+        </p:txBody>
+      </p:sp>
+      <p:sp>
+        <p:nvSpPr>
+          <p:cNvPr id="32" name="Shape 30"/>
+          <p:cNvSpPr/>
+          <p:nvPr/>
+        </p:nvSpPr>
+        <p:spPr>
+          <a:xfrm>
+            <a:off x="6473952" y="3712464"/>
+            <a:ext cx="457200" cy="457200"/>
+          </a:xfrm>
+          <a:prstGeom prst="ellipse">
+            <a:avLst/>
+          </a:prstGeom>
+          <a:solidFill>
+            <a:srgbClr val="8FAE55"/>
+          </a:solidFill>
+          <a:ln/>
+        </p:spPr>
+        <p:txBody>
+          <a:bodyPr/>
+          <a:lstStyle/>
+          <a:p>
+            <a:endParaRPr lang="ko-KR" altLang="en-US"/>
+          </a:p>
+        </p:txBody>
+      </p:sp>
+      <p:sp>
+        <p:nvSpPr>
+          <p:cNvPr id="33" name="Text 31"/>
+          <p:cNvSpPr/>
+          <p:nvPr/>
+        </p:nvSpPr>
+        <p:spPr>
+          <a:xfrm>
+            <a:off x="6473952" y="3712464"/>
+            <a:ext cx="457200" cy="457200"/>
+          </a:xfrm>
+          <a:prstGeom prst="rect">
+            <a:avLst/>
+          </a:prstGeom>
+          <a:noFill/>
+          <a:ln/>
+        </p:spPr>
+        <p:txBody>
+          <a:bodyPr wrap="square" lIns="0" tIns="0" rIns="0" bIns="0" rtlCol="0" anchor="ctr"/>
+          <a:lstStyle/>
+          <a:p>
+            <a:pPr marL="0" indent="0" algn="ctr">
+              <a:buNone/>
+            </a:pPr>
+            <a:r>
+              <a:rPr lang="en-US" sz="1500" b="1" dirty="0">
+                <a:solidFill>
+                  <a:srgbClr val="FFFFFF"/>
+                </a:solidFill>
+                <a:latin typeface="Georgia" pitchFamily="34" charset="0"/>
+                <a:ea typeface="Georgia" pitchFamily="34" charset="-122"/>
+                <a:cs typeface="Georgia" pitchFamily="34" charset="-120"/>
+              </a:rPr>
+              <a:t>2</a:t>
+            </a:r>
+            <a:endParaRPr lang="en-US" sz="1500" dirty="0"/>
+          </a:p>
+        </p:txBody>
+      </p:sp>
+      <p:sp>
+        <p:nvSpPr>
+          <p:cNvPr id="34" name="Text 32"/>
+          <p:cNvSpPr/>
+          <p:nvPr/>
+        </p:nvSpPr>
+        <p:spPr>
+          <a:xfrm>
+            <a:off x="7095744" y="3675888"/>
+            <a:ext cx="4197096" cy="365760"/>
+          </a:xfrm>
+          <a:prstGeom prst="rect">
+            <a:avLst/>
+          </a:prstGeom>
+          <a:noFill/>
+          <a:ln/>
+        </p:spPr>
+        <p:txBody>
+          <a:bodyPr wrap="square" lIns="0" tIns="0" rIns="0" bIns="0" rtlCol="0" anchor="ctr"/>
+          <a:lstStyle/>
+          <a:p>
+            <a:pPr marL="0" indent="0" algn="l">
+              <a:buNone/>
+            </a:pPr>
+            <a:r>
+              <a:rPr lang="en-US" sz="1450" b="1" dirty="0">
+                <a:solidFill>
+                  <a:srgbClr val="2E3322"/>
+                </a:solidFill>
+                <a:latin typeface="Malgun Gothic" pitchFamily="34" charset="0"/>
+                <a:ea typeface="Malgun Gothic" pitchFamily="34" charset="-122"/>
+                <a:cs typeface="Malgun Gothic" pitchFamily="34" charset="-120"/>
+              </a:rPr>
+              <a:t>데이터 · 로컬라이징 파이프라인</a:t>
+            </a:r>
+            <a:endParaRPr lang="en-US" sz="1450" dirty="0"/>
+          </a:p>
+        </p:txBody>
+      </p:sp>
+      <p:sp>
+        <p:nvSpPr>
+          <p:cNvPr id="35" name="Text 33"/>
+          <p:cNvSpPr/>
+          <p:nvPr/>
+        </p:nvSpPr>
+        <p:spPr>
+          <a:xfrm>
+            <a:off x="7095744" y="4059936"/>
+            <a:ext cx="4151376" cy="749808"/>
+          </a:xfrm>
+          <a:prstGeom prst="rect">
+            <a:avLst/>
+          </a:prstGeom>
+          <a:noFill/>
+          <a:ln/>
+        </p:spPr>
+        <p:txBody>
+          <a:bodyPr wrap="square" lIns="0" tIns="0" rIns="0" bIns="0" rtlCol="0" anchor="t"/>
+          <a:lstStyle/>
+          <a:p>
+            <a:pPr marL="0" indent="0" algn="l">
+              <a:buNone/>
+            </a:pPr>
+            <a:r>
+              <a:rPr lang="en-US" sz="1200" dirty="0">
+                <a:solidFill>
+                  <a:srgbClr val="6B6A50"/>
+                </a:solidFill>
+                <a:latin typeface="Malgun Gothic" pitchFamily="34" charset="0"/>
+                <a:ea typeface="Malgun Gothic" pitchFamily="34" charset="-122"/>
+                <a:cs typeface="Malgun Gothic" pitchFamily="34" charset="-120"/>
+              </a:rPr>
+              <a:t>CSV·시트 연동과 스트링 테이블을 도입해 밸런싱·다국어를 체계화 (위 아쉬운 점 개선).</a:t>
+            </a:r>
+            <a:endParaRPr lang="en-US" sz="1200" dirty="0"/>
+          </a:p>
+        </p:txBody>
+      </p:sp>
+      <p:sp>
+        <p:nvSpPr>
+          <p:cNvPr id="37" name="Text 35"/>
+          <p:cNvSpPr/>
+          <p:nvPr/>
+        </p:nvSpPr>
+        <p:spPr>
+          <a:xfrm>
+            <a:off x="6473952" y="4919472"/>
+            <a:ext cx="457200" cy="457200"/>
+          </a:xfrm>
+          <a:prstGeom prst="rect">
+            <a:avLst/>
+          </a:prstGeom>
+          <a:noFill/>
+          <a:ln/>
+        </p:spPr>
+        <p:txBody>
+          <a:bodyPr wrap="square" lIns="0" tIns="0" rIns="0" bIns="0" rtlCol="0" anchor="ctr"/>
+          <a:lstStyle/>
+          <a:p>
+            <a:pPr marL="0" indent="0" algn="ctr">
+              <a:buNone/>
+            </a:pPr>
+            <a:r>
+              <a:rPr lang="en-US" sz="1500" b="1" dirty="0">
+                <a:solidFill>
+                  <a:srgbClr val="FFFFFF"/>
+                </a:solidFill>
+                <a:latin typeface="Georgia" pitchFamily="34" charset="0"/>
+                <a:ea typeface="Georgia" pitchFamily="34" charset="-122"/>
+                <a:cs typeface="Georgia" pitchFamily="34" charset="-120"/>
+              </a:rPr>
+              <a:t>3</a:t>
+            </a:r>
+            <a:endParaRPr lang="en-US" sz="1500" dirty="0"/>
+          </a:p>
+        </p:txBody>
+      </p:sp>
+      <p:sp>
+        <p:nvSpPr>
+          <p:cNvPr id="40" name="Text 38"/>
+          <p:cNvSpPr/>
+          <p:nvPr/>
+        </p:nvSpPr>
+        <p:spPr>
+          <a:xfrm>
+            <a:off x="566928" y="6400800"/>
+            <a:ext cx="7315200" cy="274320"/>
+          </a:xfrm>
+          <a:prstGeom prst="rect">
+            <a:avLst/>
+          </a:prstGeom>
+          <a:noFill/>
+          <a:ln/>
+        </p:spPr>
+        <p:txBody>
+          <a:bodyPr wrap="square" lIns="0" tIns="0" rIns="0" bIns="0" rtlCol="0" anchor="ctr"/>
+          <a:lstStyle/>
+          <a:p>
+            <a:pPr marL="0" indent="0" algn="l">
+              <a:buNone/>
+            </a:pPr>
+            <a:r>
+              <a:rPr lang="en-US" sz="900" b="1" dirty="0">
+                <a:solidFill>
+                  <a:srgbClr val="4A6535"/>
+                </a:solidFill>
+                <a:latin typeface="Malgun Gothic" pitchFamily="34" charset="0"/>
+                <a:ea typeface="Malgun Gothic" pitchFamily="34" charset="-122"/>
+                <a:cs typeface="Malgun Gothic" pitchFamily="34" charset="-120"/>
+              </a:rPr>
+              <a:t>SpiritStack</a:t>
+            </a:r>
+            <a:r>
+              <a:rPr lang="en-US" sz="900" dirty="0">
+                <a:solidFill>
+                  <a:srgbClr val="6B6A50"/>
+                </a:solidFill>
+                <a:latin typeface="Malgun Gothic" pitchFamily="34" charset="0"/>
+                <a:ea typeface="Malgun Gothic" pitchFamily="34" charset="-122"/>
+                <a:cs typeface="Malgun Gothic" pitchFamily="34" charset="-120"/>
+              </a:rPr>
+              <a:t>  ·  카드 스태킹 생존 경영 게임</a:t>
+            </a:r>
+            <a:endParaRPr lang="en-US" sz="900" dirty="0"/>
+          </a:p>
+        </p:txBody>
+      </p:sp>
+    </p:spTree>
+    <p:extLst>
+      <p:ext uri="{BB962C8B-B14F-4D97-AF65-F5344CB8AC3E}">
+        <p14:creationId xmlns:p14="http://schemas.microsoft.com/office/powerpoint/2010/main" val="2111612890"/>
+      </p:ext>
+    </p:extLst>
+  </p:cSld>
+  <p:clrMapOvr>
+    <a:masterClrMapping/>
+  </p:clrMapOvr>
+</p:sld>
+</file>
+
+<file path=ppt/slides/slide15.xml><?xml version="1.0" encoding="utf-8"?>
+<p:sld xmlns:a="http://schemas.openxmlformats.org/drawingml/2006/main" xmlns:r="http://schemas.openxmlformats.org/officeDocument/2006/relationships" xmlns:p="http://schemas.openxmlformats.org/presentationml/2006/main">
   <p:cSld name="Slide 14">
     <p:bg>
       <p:bgPr>
@@ -8582,15 +9886,7 @@
 
 <file path=ppt/slides/slide2.xml><?xml version="1.0" encoding="utf-8"?>
 <p:sld xmlns:a="http://schemas.openxmlformats.org/drawingml/2006/main" xmlns:r="http://schemas.openxmlformats.org/officeDocument/2006/relationships" xmlns:p="http://schemas.openxmlformats.org/presentationml/2006/main">
-  <p:cSld name="Slide 2">
-    <p:bg>
-      <p:bgPr>
-        <a:solidFill>
-          <a:srgbClr val="F7F1E1"/>
-        </a:solidFill>
-        <a:effectLst/>
-      </p:bgPr>
-    </p:bg>
+  <p:cSld>
     <p:spTree>
       <p:nvGrpSpPr>
         <p:cNvPr id="1" name=""/>
@@ -10720,7 +12016,192 @@
       </p:sp>
       <p:sp>
         <p:nvSpPr>
-          <p:cNvPr id="59" name="Text 57"/>
+          <p:cNvPr id="59" name="Shape 57"/>
+          <p:cNvSpPr/>
+          <p:nvPr/>
+        </p:nvSpPr>
+        <p:spPr>
+          <a:xfrm>
+            <a:off x="6355080" y="5422392"/>
+            <a:ext cx="5212080" cy="658368"/>
+          </a:xfrm>
+          <a:prstGeom prst="roundRect">
+            <a:avLst>
+              <a:gd name="adj" fmla="val 13889"/>
+            </a:avLst>
+          </a:prstGeom>
+          <a:solidFill>
+            <a:srgbClr val="FCF8EE"/>
+          </a:solidFill>
+          <a:ln w="12700">
+            <a:solidFill>
+              <a:srgbClr val="C2D0AE"/>
+            </a:solidFill>
+            <a:prstDash val="solid"/>
+          </a:ln>
+          <a:effectLst>
+            <a:outerShdw blurRad="88900" dist="38100" dir="5400000" algn="bl" rotWithShape="0">
+              <a:srgbClr val="3A3A2A">
+                <a:alpha val="18000"/>
+              </a:srgbClr>
+            </a:outerShdw>
+          </a:effectLst>
+        </p:spPr>
+        <p:txBody>
+          <a:bodyPr/>
+          <a:lstStyle/>
+          <a:p>
+            <a:endParaRPr lang="ko-KR" altLang="en-US"/>
+          </a:p>
+        </p:txBody>
+      </p:sp>
+      <p:sp>
+        <p:nvSpPr>
+          <p:cNvPr id="60" name="Shape 58"/>
+          <p:cNvSpPr/>
+          <p:nvPr/>
+        </p:nvSpPr>
+        <p:spPr>
+          <a:xfrm>
+            <a:off x="6556248" y="5541264"/>
+            <a:ext cx="420624" cy="420624"/>
+          </a:xfrm>
+          <a:prstGeom prst="ellipse">
+            <a:avLst/>
+          </a:prstGeom>
+          <a:solidFill>
+            <a:srgbClr val="8C6239"/>
+          </a:solidFill>
+          <a:ln/>
+        </p:spPr>
+        <p:txBody>
+          <a:bodyPr/>
+          <a:lstStyle/>
+          <a:p>
+            <a:endParaRPr lang="ko-KR" altLang="en-US"/>
+          </a:p>
+        </p:txBody>
+      </p:sp>
+      <p:sp>
+        <p:nvSpPr>
+          <p:cNvPr id="61" name="Text 59"/>
+          <p:cNvSpPr/>
+          <p:nvPr/>
+        </p:nvSpPr>
+        <p:spPr>
+          <a:xfrm>
+            <a:off x="6556248" y="5541264"/>
+            <a:ext cx="420624" cy="420624"/>
+          </a:xfrm>
+          <a:prstGeom prst="rect">
+            <a:avLst/>
+          </a:prstGeom>
+          <a:noFill/>
+          <a:ln/>
+        </p:spPr>
+        <p:txBody>
+          <a:bodyPr wrap="square" lIns="0" tIns="0" rIns="0" bIns="0" rtlCol="0" anchor="ctr"/>
+          <a:lstStyle/>
+          <a:p>
+            <a:pPr marL="0" indent="0" algn="ctr">
+              <a:buNone/>
+            </a:pPr>
+            <a:r>
+              <a:rPr lang="en-US" sz="1400" b="1" dirty="0">
+                <a:solidFill>
+                  <a:srgbClr val="FFFFFF"/>
+                </a:solidFill>
+                <a:latin typeface="Georgia" pitchFamily="34" charset="0"/>
+                <a:ea typeface="Georgia" pitchFamily="34" charset="-122"/>
+                <a:cs typeface="Georgia" pitchFamily="34" charset="-120"/>
+              </a:rPr>
+              <a:t>12</a:t>
+            </a:r>
+            <a:endParaRPr lang="en-US" sz="1400" dirty="0"/>
+          </a:p>
+        </p:txBody>
+      </p:sp>
+      <p:sp>
+        <p:nvSpPr>
+          <p:cNvPr id="62" name="Text 60"/>
+          <p:cNvSpPr/>
+          <p:nvPr/>
+        </p:nvSpPr>
+        <p:spPr>
+          <a:xfrm>
+            <a:off x="7141464" y="5504688"/>
+            <a:ext cx="4297680" cy="329184"/>
+          </a:xfrm>
+          <a:prstGeom prst="rect">
+            <a:avLst/>
+          </a:prstGeom>
+          <a:noFill/>
+          <a:ln/>
+        </p:spPr>
+        <p:txBody>
+          <a:bodyPr wrap="square" lIns="0" tIns="0" rIns="0" bIns="0" rtlCol="0" anchor="ctr"/>
+          <a:lstStyle/>
+          <a:p>
+            <a:pPr marL="0" indent="0" algn="l">
+              <a:buNone/>
+            </a:pPr>
+            <a:r>
+              <a:rPr lang="en-US" sz="1500" b="1" dirty="0">
+                <a:solidFill>
+                  <a:srgbClr val="2E3322"/>
+                </a:solidFill>
+                <a:latin typeface="Malgun Gothic" pitchFamily="34" charset="0"/>
+                <a:ea typeface="Malgun Gothic" pitchFamily="34" charset="-122"/>
+                <a:cs typeface="Malgun Gothic" pitchFamily="34" charset="-120"/>
+              </a:rPr>
+              <a:t>아쉬웠던 점 &amp; 향후 과제</a:t>
+            </a:r>
+            <a:endParaRPr lang="en-US" sz="1500" dirty="0"/>
+          </a:p>
+        </p:txBody>
+      </p:sp>
+      <p:sp>
+        <p:nvSpPr>
+          <p:cNvPr id="63" name="Text 61"/>
+          <p:cNvSpPr/>
+          <p:nvPr/>
+        </p:nvSpPr>
+        <p:spPr>
+          <a:xfrm>
+            <a:off x="7141464" y="5815584"/>
+            <a:ext cx="4297680" cy="237744"/>
+          </a:xfrm>
+          <a:prstGeom prst="rect">
+            <a:avLst/>
+          </a:prstGeom>
+          <a:noFill/>
+          <a:ln/>
+        </p:spPr>
+        <p:txBody>
+          <a:bodyPr wrap="square" lIns="0" tIns="0" rIns="0" bIns="0" rtlCol="0" anchor="ctr"/>
+          <a:lstStyle/>
+          <a:p>
+            <a:pPr marL="0" indent="0" algn="l">
+              <a:buNone/>
+            </a:pPr>
+            <a:r>
+              <a:rPr lang="en-US" sz="1000" dirty="0">
+                <a:solidFill>
+                  <a:srgbClr val="6B6A50"/>
+                </a:solidFill>
+                <a:latin typeface="Georgia" pitchFamily="34" charset="0"/>
+                <a:ea typeface="Georgia" pitchFamily="34" charset="-122"/>
+                <a:cs typeface="Georgia" pitchFamily="34" charset="-120"/>
+              </a:rPr>
+              <a:t>Retrospective · Future</a:t>
+            </a:r>
+            <a:endParaRPr lang="en-US" sz="1000" dirty="0"/>
+          </a:p>
+        </p:txBody>
+      </p:sp>
+      <p:sp>
+        <p:nvSpPr>
+          <p:cNvPr id="64" name="Text 62"/>
           <p:cNvSpPr/>
           <p:nvPr/>
         </p:nvSpPr>
@@ -10770,7 +12251,7 @@
       </p:sp>
       <p:sp>
         <p:nvSpPr>
-          <p:cNvPr id="60" name="Shape 58"/>
+          <p:cNvPr id="65" name="Shape 63"/>
           <p:cNvSpPr/>
           <p:nvPr/>
         </p:nvSpPr>
@@ -10797,7 +12278,7 @@
       </p:sp>
       <p:sp>
         <p:nvSpPr>
-          <p:cNvPr id="61" name="Text 59"/>
+          <p:cNvPr id="66" name="Text 64"/>
           <p:cNvSpPr/>
           <p:nvPr/>
         </p:nvSpPr>
@@ -10835,6 +12316,11 @@
         </p:txBody>
       </p:sp>
     </p:spTree>
+    <p:extLst>
+      <p:ext uri="{BB962C8B-B14F-4D97-AF65-F5344CB8AC3E}">
+        <p14:creationId xmlns:p14="http://schemas.microsoft.com/office/powerpoint/2010/main" val="4134694212"/>
+      </p:ext>
+    </p:extLst>
   </p:cSld>
   <p:clrMapOvr>
     <a:masterClrMapping/>
@@ -11125,137 +12611,6 @@
       </p:sp>
       <p:sp>
         <p:nvSpPr>
-          <p:cNvPr id="8" name="Text 6"/>
-          <p:cNvSpPr/>
-          <p:nvPr/>
-        </p:nvSpPr>
-        <p:spPr>
-          <a:xfrm>
-            <a:off x="914400" y="2542032"/>
-            <a:ext cx="5212080" cy="2331720"/>
-          </a:xfrm>
-          <a:prstGeom prst="rect">
-            <a:avLst/>
-          </a:prstGeom>
-          <a:noFill/>
-          <a:ln/>
-        </p:spPr>
-        <p:txBody>
-          <a:bodyPr wrap="square" lIns="0" tIns="0" rIns="0" bIns="0" rtlCol="0" anchor="t"/>
-          <a:lstStyle/>
-          <a:p>
-            <a:pPr marL="190500" indent="-190500" algn="l">
-              <a:buSzPct val="100000"/>
-              <a:buChar char="•"/>
-            </a:pPr>
-            <a:r>
-              <a:rPr lang="en-US" sz="1400" b="1" dirty="0">
-                <a:solidFill>
-                  <a:srgbClr val="000000"/>
-                </a:solidFill>
-                <a:latin typeface="Malgun Gothic" pitchFamily="34" charset="0"/>
-                <a:ea typeface="Malgun Gothic" pitchFamily="34" charset="-122"/>
-                <a:cs typeface="Malgun Gothic" pitchFamily="34" charset="-120"/>
-              </a:rPr>
-              <a:t>카드를 쌓아 상호작용</a:t>
-            </a:r>
-            <a:endParaRPr lang="en-US" sz="1400" dirty="0"/>
-          </a:p>
-          <a:p>
-            <a:pPr marL="0" indent="0" algn="l">
-              <a:spcAft>
-                <a:spcPts val="900"/>
-              </a:spcAft>
-              <a:buNone/>
-            </a:pPr>
-            <a:r>
-              <a:rPr lang="en-US" sz="1250" dirty="0">
-                <a:solidFill>
-                  <a:srgbClr val="6B6A50"/>
-                </a:solidFill>
-                <a:latin typeface="Malgun Gothic" pitchFamily="34" charset="0"/>
-                <a:ea typeface="Malgun Gothic" pitchFamily="34" charset="-122"/>
-                <a:cs typeface="Malgun Gothic" pitchFamily="34" charset="-120"/>
-              </a:rPr>
-              <a:t>주민을 자원·건물에 올려 채집·제작·전투를 자동화</a:t>
-            </a:r>
-            <a:endParaRPr lang="en-US" sz="1400" dirty="0"/>
-          </a:p>
-          <a:p>
-            <a:pPr marL="0" indent="0" algn="l">
-              <a:buNone/>
-            </a:pPr>
-            <a:r>
-              <a:rPr lang="en-US" sz="1400" b="1" dirty="0">
-                <a:solidFill>
-                  <a:srgbClr val="000000"/>
-                </a:solidFill>
-                <a:latin typeface="Malgun Gothic" pitchFamily="34" charset="0"/>
-                <a:ea typeface="Malgun Gothic" pitchFamily="34" charset="-122"/>
-                <a:cs typeface="Malgun Gothic" pitchFamily="34" charset="-120"/>
-              </a:rPr>
-              <a:t>수집과 발견 중심의 확장</a:t>
-            </a:r>
-            <a:endParaRPr lang="en-US" sz="1400" dirty="0"/>
-          </a:p>
-          <a:p>
-            <a:pPr marL="0" indent="0" algn="l">
-              <a:spcAft>
-                <a:spcPts val="900"/>
-              </a:spcAft>
-              <a:buNone/>
-            </a:pPr>
-            <a:r>
-              <a:rPr lang="en-US" sz="1250" dirty="0">
-                <a:solidFill>
-                  <a:srgbClr val="6B6A50"/>
-                </a:solidFill>
-                <a:latin typeface="Malgun Gothic" pitchFamily="34" charset="0"/>
-                <a:ea typeface="Malgun Gothic" pitchFamily="34" charset="-122"/>
-                <a:cs typeface="Malgun Gothic" pitchFamily="34" charset="-120"/>
-              </a:rPr>
-              <a:t>200여 종 카드 · 13종 카드팩(요리·농사·건설) · 퀘스트</a:t>
-            </a:r>
-            <a:endParaRPr lang="en-US" sz="1400" dirty="0"/>
-          </a:p>
-          <a:p>
-            <a:pPr marL="0" indent="0" algn="l">
-              <a:buNone/>
-            </a:pPr>
-            <a:r>
-              <a:rPr lang="en-US" sz="1400" b="1" dirty="0">
-                <a:solidFill>
-                  <a:srgbClr val="000000"/>
-                </a:solidFill>
-                <a:latin typeface="Malgun Gothic" pitchFamily="34" charset="0"/>
-                <a:ea typeface="Malgun Gothic" pitchFamily="34" charset="-122"/>
-                <a:cs typeface="Malgun Gothic" pitchFamily="34" charset="-120"/>
-              </a:rPr>
-              <a:t>문(Moon) 주기 생존 · 로그라이트</a:t>
-            </a:r>
-            <a:endParaRPr lang="en-US" sz="1400" dirty="0"/>
-          </a:p>
-          <a:p>
-            <a:pPr marL="0" indent="0" algn="l">
-              <a:buNone/>
-            </a:pPr>
-            <a:r>
-              <a:rPr lang="en-US" sz="1250" dirty="0">
-                <a:solidFill>
-                  <a:srgbClr val="6B6A50"/>
-                </a:solidFill>
-                <a:latin typeface="Malgun Gothic" pitchFamily="34" charset="0"/>
-                <a:ea typeface="Malgun Gothic" pitchFamily="34" charset="-122"/>
-                <a:cs typeface="Malgun Gothic" pitchFamily="34" charset="-120"/>
-              </a:rPr>
-              <a:t>주기마다 식량 소비, 적과 자동 전투로 버티는 생존 루프</a:t>
-            </a:r>
-            <a:endParaRPr lang="en-US" sz="1400" dirty="0"/>
-          </a:p>
-        </p:txBody>
-      </p:sp>
-      <p:sp>
-        <p:nvSpPr>
           <p:cNvPr id="9" name="Shape 7"/>
           <p:cNvSpPr/>
           <p:nvPr/>
@@ -11792,7 +13147,51 @@
                 <a:ea typeface="Malgun Gothic" pitchFamily="34" charset="-122"/>
                 <a:cs typeface="Malgun Gothic" pitchFamily="34" charset="-120"/>
               </a:rPr>
-              <a:t>복잡한 조작 없이 카드를 쌓는 명상적이고 느긋한 플레이</a:t>
+              <a:t>복잡한 조작 없이 카드를 </a:t>
+            </a:r>
+            <a:r>
+              <a:rPr lang="en-US" sz="1100" dirty="0" err="1">
+                <a:solidFill>
+                  <a:srgbClr val="D9E0C8"/>
+                </a:solidFill>
+                <a:latin typeface="Malgun Gothic" pitchFamily="34" charset="0"/>
+                <a:ea typeface="Malgun Gothic" pitchFamily="34" charset="-122"/>
+                <a:cs typeface="Malgun Gothic" pitchFamily="34" charset="-120"/>
+              </a:rPr>
+              <a:t>쌓는</a:t>
+            </a:r>
+            <a:r>
+              <a:rPr lang="en-US" sz="1100" dirty="0">
+                <a:solidFill>
+                  <a:srgbClr val="D9E0C8"/>
+                </a:solidFill>
+                <a:latin typeface="Malgun Gothic" pitchFamily="34" charset="0"/>
+                <a:ea typeface="Malgun Gothic" pitchFamily="34" charset="-122"/>
+                <a:cs typeface="Malgun Gothic" pitchFamily="34" charset="-120"/>
+              </a:rPr>
+              <a:t> </a:t>
+            </a:r>
+            <a:r>
+              <a:rPr lang="ko-KR" altLang="en-US" sz="1100" dirty="0">
+                <a:solidFill>
+                  <a:srgbClr val="D9E0C8"/>
+                </a:solidFill>
+                <a:latin typeface="Malgun Gothic" pitchFamily="34" charset="0"/>
+                <a:ea typeface="Malgun Gothic" pitchFamily="34" charset="-122"/>
+                <a:cs typeface="Malgun Gothic" pitchFamily="34" charset="-120"/>
+              </a:rPr>
+              <a:t>잔잔하고</a:t>
+            </a:r>
+            <a:r>
+              <a:rPr lang="en-US" sz="1100" dirty="0">
+                <a:solidFill>
+                  <a:srgbClr val="D9E0C8"/>
+                </a:solidFill>
+                <a:latin typeface="Malgun Gothic" pitchFamily="34" charset="0"/>
+                <a:ea typeface="Malgun Gothic" pitchFamily="34" charset="-122"/>
+                <a:cs typeface="Malgun Gothic" pitchFamily="34" charset="-120"/>
+              </a:rPr>
+              <a:t> 느긋한 플레이</a:t>
             </a:r>
             <a:endParaRPr lang="en-US" sz="1100" dirty="0"/>
           </a:p>
@@ -11827,7 +13226,7 @@
       </p:sp>
       <p:pic>
         <p:nvPicPr>
-          <p:cNvPr id="25" name="Image 1" descr="img/cardPack_01.png"/>
+          <p:cNvPr id="25" name="Image 1"/>
           <p:cNvPicPr>
             <a:picLocks noChangeAspect="1"/>
           </p:cNvPicPr>
@@ -11840,8 +13239,8 @@
         </p:blipFill>
         <p:spPr>
           <a:xfrm>
-            <a:off x="7013448" y="3154680"/>
-            <a:ext cx="530352" cy="566928"/>
+            <a:off x="7079265" y="3154680"/>
+            <a:ext cx="398718" cy="566928"/>
           </a:xfrm>
           <a:prstGeom prst="rect">
             <a:avLst/>
@@ -12129,7 +13528,7 @@
               <a:buNone/>
             </a:pPr>
             <a:r>
-              <a:rPr lang="en-US" sz="1450" b="1" dirty="0">
+              <a:rPr lang="ko-KR" altLang="en-US" sz="1450" b="1" dirty="0">
                 <a:solidFill>
                   <a:srgbClr val="FFFFFF"/>
                 </a:solidFill>
@@ -12137,7 +13536,7 @@
                 <a:ea typeface="Malgun Gothic" pitchFamily="34" charset="-122"/>
                 <a:cs typeface="Malgun Gothic" pitchFamily="34" charset="-120"/>
               </a:rPr>
-              <a:t>따뜻한 핸드드로잉 감성</a:t>
+              <a:t>모험과 발견 중심의 확장</a:t>
             </a:r>
             <a:endParaRPr lang="en-US" sz="1450" dirty="0"/>
           </a:p>
@@ -12168,7 +13567,7 @@
               <a:buNone/>
             </a:pPr>
             <a:r>
-              <a:rPr lang="en-US" sz="1100" dirty="0">
+              <a:rPr lang="ko-KR" altLang="en-US" sz="1100" dirty="0">
                 <a:solidFill>
                   <a:srgbClr val="D9E0C8"/>
                 </a:solidFill>
@@ -12176,48 +13575,9 @@
                 <a:ea typeface="Malgun Gothic" pitchFamily="34" charset="-122"/>
                 <a:cs typeface="Malgun Gothic" pitchFamily="34" charset="-120"/>
               </a:rPr>
-              <a:t>귀엽고 아늑한 아트가 주는 편안한 분위기</a:t>
+              <a:t>다른 곳으로 이동을 하거나 포탈을 통한 탐험 시스템</a:t>
             </a:r>
             <a:endParaRPr lang="en-US" sz="1100" dirty="0"/>
-          </a:p>
-        </p:txBody>
-      </p:sp>
-      <p:sp>
-        <p:nvSpPr>
-          <p:cNvPr id="36" name="Text 30"/>
-          <p:cNvSpPr/>
-          <p:nvPr/>
-        </p:nvSpPr>
-        <p:spPr>
-          <a:xfrm>
-            <a:off x="6903720" y="5742432"/>
-            <a:ext cx="4443984" cy="365760"/>
-          </a:xfrm>
-          <a:prstGeom prst="rect">
-            <a:avLst/>
-          </a:prstGeom>
-          <a:noFill/>
-          <a:ln/>
-        </p:spPr>
-        <p:txBody>
-          <a:bodyPr wrap="square" lIns="0" tIns="0" rIns="0" bIns="0" rtlCol="0" anchor="ctr"/>
-          <a:lstStyle/>
-          <a:p>
-            <a:pPr marL="0" indent="0" algn="ctr">
-              <a:buNone/>
-            </a:pPr>
-            <a:r>
-              <a:rPr lang="en-US" sz="1150" b="1" i="1" dirty="0">
-                <a:solidFill>
-                  <a:srgbClr val="E0A23A"/>
-                </a:solidFill>
-                <a:latin typeface="Malgun Gothic" pitchFamily="34" charset="0"/>
-                <a:ea typeface="Malgun Gothic" pitchFamily="34" charset="-122"/>
-                <a:cs typeface="Malgun Gothic" pitchFamily="34" charset="-120"/>
-              </a:rPr>
-              <a:t>→ ‘단순하지만 깊은’ 카드 스태킹 루프와 따뜻한 감성에 매력을 느껴 SpiritStack 의 모티브로 삼았다</a:t>
-            </a:r>
-            <a:endParaRPr lang="en-US" sz="1150" dirty="0"/>
           </a:p>
         </p:txBody>
       </p:sp>
@@ -12337,6 +13697,50 @@
           </a:p>
         </p:txBody>
       </p:sp>
+      <p:pic>
+        <p:nvPicPr>
+          <p:cNvPr id="41" name="그림 40" descr="텍스트, 스크린샷, 지도이(가) 표시된 사진&#10;&#10;자동 생성된 설명">
+            <a:extLst>
+              <a:ext uri="{FF2B5EF4-FFF2-40B4-BE49-F238E27FC236}">
+                <a16:creationId xmlns:a16="http://schemas.microsoft.com/office/drawing/2014/main" id="{5AB61DDA-9D03-C95D-5095-DF4329418BCA}"/>
+              </a:ext>
+            </a:extLst>
+          </p:cNvPr>
+          <p:cNvPicPr>
+            <a:picLocks noChangeAspect="1"/>
+          </p:cNvPicPr>
+          <p:nvPr/>
+        </p:nvPicPr>
+        <p:blipFill>
+          <a:blip r:embed="rId7"/>
+          <a:stretch>
+            <a:fillRect/>
+          </a:stretch>
+        </p:blipFill>
+        <p:spPr>
+          <a:xfrm>
+            <a:off x="1263600" y="2381635"/>
+            <a:ext cx="4413096" cy="2482973"/>
+          </a:xfrm>
+          <a:prstGeom prst="rect">
+            <a:avLst/>
+          </a:prstGeom>
+          <a:ln w="38100" cap="sq">
+            <a:solidFill>
+              <a:srgbClr val="000000"/>
+            </a:solidFill>
+            <a:prstDash val="solid"/>
+            <a:miter lim="800000"/>
+          </a:ln>
+          <a:effectLst>
+            <a:outerShdw blurRad="50800" dist="38100" dir="2700000" algn="tl" rotWithShape="0">
+              <a:srgbClr val="000000">
+                <a:alpha val="43000"/>
+              </a:srgbClr>
+            </a:outerShdw>
+          </a:effectLst>
+        </p:spPr>
+      </p:pic>
     </p:spTree>
   </p:cSld>
   <p:clrMapOvr>
@@ -12566,7 +13970,7 @@
       </p:sp>
       <p:pic>
         <p:nvPicPr>
-          <p:cNvPr id="7" name="Image 0" descr="img/villager.png"/>
+          <p:cNvPr id="7" name="Image 0"/>
           <p:cNvPicPr>
             <a:picLocks noChangeAspect="1"/>
           </p:cNvPicPr>
@@ -12770,7 +14174,7 @@
           <p:nvPr/>
         </p:nvPicPr>
         <p:blipFill>
-          <a:blip r:embed="rId3"/>
+          <a:blip r:embed="rId4"/>
           <a:srcRect/>
           <a:stretch/>
         </p:blipFill>
@@ -13000,7 +14404,7 @@
           <p:nvPr/>
         </p:nvPicPr>
         <p:blipFill>
-          <a:blip r:embed="rId4"/>
+          <a:blip r:embed="rId5"/>
           <a:srcRect/>
           <a:stretch/>
         </p:blipFill>
@@ -13230,7 +14634,7 @@
           <p:nvPr/>
         </p:nvPicPr>
         <p:blipFill>
-          <a:blip r:embed="rId5"/>
+          <a:blip r:embed="rId6"/>
           <a:srcRect/>
           <a:stretch/>
         </p:blipFill>
@@ -13460,7 +14864,7 @@
           <p:nvPr/>
         </p:nvPicPr>
         <p:blipFill>
-          <a:blip r:embed="rId6"/>
+          <a:blip r:embed="rId7"/>
           <a:srcRect/>
           <a:stretch/>
         </p:blipFill>
@@ -13690,7 +15094,7 @@
           <p:nvPr/>
         </p:nvPicPr>
         <p:blipFill>
-          <a:blip r:embed="rId7"/>
+          <a:blip r:embed="rId8"/>
           <a:srcRect/>
           <a:stretch/>
         </p:blipFill>

--- a/JellyStack/SpiritStack_발표자료.pptx
+++ b/JellyStack/SpiritStack_발표자료.pptx
@@ -9619,6 +9619,458 @@
               <a:t>  ·  카드 스태킹 생존 경영 게임</a:t>
             </a:r>
             <a:endParaRPr lang="en-US" sz="900" dirty="0"/>
+          </a:p>
+        </p:txBody>
+      </p:sp>
+      <p:sp>
+        <p:nvSpPr>
+          <p:cNvPr id="19" name="Shape 30">
+            <a:extLst>
+              <a:ext uri="{FF2B5EF4-FFF2-40B4-BE49-F238E27FC236}">
+                <a16:creationId xmlns:a16="http://schemas.microsoft.com/office/drawing/2014/main" id="{44FEAE3F-FF2D-BC7C-B7FD-F1B0CA024C43}"/>
+              </a:ext>
+            </a:extLst>
+          </p:cNvPr>
+          <p:cNvSpPr/>
+          <p:nvPr/>
+        </p:nvSpPr>
+        <p:spPr>
+          <a:xfrm>
+            <a:off x="6496812" y="4919472"/>
+            <a:ext cx="457200" cy="457200"/>
+          </a:xfrm>
+          <a:prstGeom prst="ellipse">
+            <a:avLst/>
+          </a:prstGeom>
+          <a:solidFill>
+            <a:srgbClr val="8FAE55"/>
+          </a:solidFill>
+          <a:ln/>
+        </p:spPr>
+        <p:txBody>
+          <a:bodyPr/>
+          <a:lstStyle/>
+          <a:p>
+            <a:endParaRPr lang="ko-KR" altLang="en-US"/>
+          </a:p>
+        </p:txBody>
+      </p:sp>
+      <p:sp>
+        <p:nvSpPr>
+          <p:cNvPr id="21" name="Text 31">
+            <a:extLst>
+              <a:ext uri="{FF2B5EF4-FFF2-40B4-BE49-F238E27FC236}">
+                <a16:creationId xmlns:a16="http://schemas.microsoft.com/office/drawing/2014/main" id="{13032460-1017-EFFB-BDDC-6754D176BFA0}"/>
+              </a:ext>
+            </a:extLst>
+          </p:cNvPr>
+          <p:cNvSpPr/>
+          <p:nvPr/>
+        </p:nvSpPr>
+        <p:spPr>
+          <a:xfrm>
+            <a:off x="6496812" y="4919472"/>
+            <a:ext cx="457200" cy="457200"/>
+          </a:xfrm>
+          <a:prstGeom prst="rect">
+            <a:avLst/>
+          </a:prstGeom>
+          <a:noFill/>
+          <a:ln/>
+        </p:spPr>
+        <p:txBody>
+          <a:bodyPr wrap="square" lIns="0" tIns="0" rIns="0" bIns="0" rtlCol="0" anchor="ctr"/>
+          <a:lstStyle/>
+          <a:p>
+            <a:pPr marL="0" indent="0" algn="ctr">
+              <a:buNone/>
+            </a:pPr>
+            <a:r>
+              <a:rPr lang="en-US" sz="1500" b="1" dirty="0">
+                <a:solidFill>
+                  <a:srgbClr val="FFFFFF"/>
+                </a:solidFill>
+                <a:latin typeface="Georgia" pitchFamily="34" charset="0"/>
+              </a:rPr>
+              <a:t>3</a:t>
+            </a:r>
+            <a:endParaRPr lang="en-US" sz="1500" dirty="0"/>
+          </a:p>
+        </p:txBody>
+      </p:sp>
+      <p:sp>
+        <p:nvSpPr>
+          <p:cNvPr id="22" name="Text 32">
+            <a:extLst>
+              <a:ext uri="{FF2B5EF4-FFF2-40B4-BE49-F238E27FC236}">
+                <a16:creationId xmlns:a16="http://schemas.microsoft.com/office/drawing/2014/main" id="{ED60FB9D-A896-680C-AB4F-AF25E4FEC6AA}"/>
+              </a:ext>
+            </a:extLst>
+          </p:cNvPr>
+          <p:cNvSpPr/>
+          <p:nvPr/>
+        </p:nvSpPr>
+        <p:spPr>
+          <a:xfrm>
+            <a:off x="7118604" y="4882896"/>
+            <a:ext cx="4197096" cy="365760"/>
+          </a:xfrm>
+          <a:prstGeom prst="rect">
+            <a:avLst/>
+          </a:prstGeom>
+          <a:noFill/>
+          <a:ln/>
+        </p:spPr>
+        <p:txBody>
+          <a:bodyPr wrap="square" lIns="0" tIns="0" rIns="0" bIns="0" rtlCol="0" anchor="ctr"/>
+          <a:lstStyle/>
+          <a:p>
+            <a:pPr marL="0" indent="0" algn="l">
+              <a:buNone/>
+            </a:pPr>
+            <a:r>
+              <a:rPr lang="ko-KR" altLang="en-US" sz="1450" b="1" dirty="0">
+                <a:solidFill>
+                  <a:srgbClr val="2E3322"/>
+                </a:solidFill>
+                <a:latin typeface="Malgun Gothic" pitchFamily="34" charset="0"/>
+                <a:ea typeface="Malgun Gothic" pitchFamily="34" charset="-122"/>
+                <a:cs typeface="Malgun Gothic" pitchFamily="34" charset="-120"/>
+              </a:rPr>
+              <a:t>카드 정보 팝업 </a:t>
+            </a:r>
+            <a:r>
+              <a:rPr lang="en-US" altLang="ko-KR" sz="1450" b="1" dirty="0">
+                <a:solidFill>
+                  <a:srgbClr val="2E3322"/>
+                </a:solidFill>
+                <a:latin typeface="Malgun Gothic" pitchFamily="34" charset="0"/>
+                <a:ea typeface="Malgun Gothic" pitchFamily="34" charset="-122"/>
+                <a:cs typeface="Malgun Gothic" pitchFamily="34" charset="-120"/>
+              </a:rPr>
+              <a:t>UI</a:t>
+            </a:r>
+            <a:endParaRPr lang="en-US" sz="1450" dirty="0"/>
+          </a:p>
+        </p:txBody>
+      </p:sp>
+      <p:sp>
+        <p:nvSpPr>
+          <p:cNvPr id="36" name="Text 33">
+            <a:extLst>
+              <a:ext uri="{FF2B5EF4-FFF2-40B4-BE49-F238E27FC236}">
+                <a16:creationId xmlns:a16="http://schemas.microsoft.com/office/drawing/2014/main" id="{14056072-DFC8-7FA7-A0D0-D880474E84F3}"/>
+              </a:ext>
+            </a:extLst>
+          </p:cNvPr>
+          <p:cNvSpPr/>
+          <p:nvPr/>
+        </p:nvSpPr>
+        <p:spPr>
+          <a:xfrm>
+            <a:off x="7118604" y="5266944"/>
+            <a:ext cx="4151376" cy="749808"/>
+          </a:xfrm>
+          <a:prstGeom prst="rect">
+            <a:avLst/>
+          </a:prstGeom>
+          <a:noFill/>
+          <a:ln/>
+        </p:spPr>
+        <p:txBody>
+          <a:bodyPr wrap="square" lIns="0" tIns="0" rIns="0" bIns="0" rtlCol="0" anchor="t"/>
+          <a:lstStyle/>
+          <a:p>
+            <a:pPr marL="0" indent="0" algn="l">
+              <a:buNone/>
+            </a:pPr>
+            <a:r>
+              <a:rPr lang="en-US" sz="1200" dirty="0">
+                <a:solidFill>
+                  <a:srgbClr val="6B6A50"/>
+                </a:solidFill>
+                <a:latin typeface="Malgun Gothic" pitchFamily="34" charset="0"/>
+                <a:ea typeface="Malgun Gothic" pitchFamily="34" charset="-122"/>
+                <a:cs typeface="Malgun Gothic" pitchFamily="34" charset="-120"/>
+              </a:rPr>
+              <a:t>Coin </a:t>
+            </a:r>
+            <a:r>
+              <a:rPr lang="ko-KR" altLang="en-US" sz="1200" dirty="0">
+                <a:solidFill>
+                  <a:srgbClr val="6B6A50"/>
+                </a:solidFill>
+                <a:latin typeface="Malgun Gothic" pitchFamily="34" charset="0"/>
+                <a:ea typeface="Malgun Gothic" pitchFamily="34" charset="-122"/>
+                <a:cs typeface="Malgun Gothic" pitchFamily="34" charset="-120"/>
+              </a:rPr>
+              <a:t>팝업 </a:t>
+            </a:r>
+            <a:r>
+              <a:rPr lang="en-US" altLang="ko-KR" sz="1200" dirty="0" err="1">
+                <a:solidFill>
+                  <a:srgbClr val="6B6A50"/>
+                </a:solidFill>
+                <a:latin typeface="Malgun Gothic" pitchFamily="34" charset="0"/>
+                <a:ea typeface="Malgun Gothic" pitchFamily="34" charset="-122"/>
+                <a:cs typeface="Malgun Gothic" pitchFamily="34" charset="-120"/>
+              </a:rPr>
+              <a:t>ui</a:t>
+            </a:r>
+            <a:r>
+              <a:rPr lang="en-US" altLang="ko-KR" sz="1200" dirty="0">
+                <a:solidFill>
+                  <a:srgbClr val="6B6A50"/>
+                </a:solidFill>
+                <a:latin typeface="Malgun Gothic" pitchFamily="34" charset="0"/>
+                <a:ea typeface="Malgun Gothic" pitchFamily="34" charset="-122"/>
+                <a:cs typeface="Malgun Gothic" pitchFamily="34" charset="-120"/>
+              </a:rPr>
+              <a:t> </a:t>
+            </a:r>
+            <a:r>
+              <a:rPr lang="ko-KR" altLang="en-US" sz="1200" dirty="0">
+                <a:solidFill>
+                  <a:srgbClr val="6B6A50"/>
+                </a:solidFill>
+                <a:latin typeface="Malgun Gothic" pitchFamily="34" charset="0"/>
+                <a:ea typeface="Malgun Gothic" pitchFamily="34" charset="-122"/>
+                <a:cs typeface="Malgun Gothic" pitchFamily="34" charset="-120"/>
+              </a:rPr>
+              <a:t>처럼 건물 카드를 </a:t>
+            </a:r>
+            <a:r>
+              <a:rPr lang="ko-KR" altLang="en-US" sz="1200" dirty="0" err="1">
+                <a:solidFill>
+                  <a:srgbClr val="6B6A50"/>
+                </a:solidFill>
+                <a:latin typeface="Malgun Gothic" pitchFamily="34" charset="0"/>
+                <a:ea typeface="Malgun Gothic" pitchFamily="34" charset="-122"/>
+                <a:cs typeface="Malgun Gothic" pitchFamily="34" charset="-120"/>
+              </a:rPr>
+              <a:t>집을시</a:t>
+            </a:r>
+            <a:r>
+              <a:rPr lang="ko-KR" altLang="en-US" sz="1200" dirty="0">
+                <a:solidFill>
+                  <a:srgbClr val="6B6A50"/>
+                </a:solidFill>
+                <a:latin typeface="Malgun Gothic" pitchFamily="34" charset="0"/>
+                <a:ea typeface="Malgun Gothic" pitchFamily="34" charset="-122"/>
+                <a:cs typeface="Malgun Gothic" pitchFamily="34" charset="-120"/>
+              </a:rPr>
+              <a:t> 정보가 나오게 구현</a:t>
+            </a:r>
+            <a:endParaRPr lang="en-US" sz="1200" dirty="0"/>
+          </a:p>
+        </p:txBody>
+      </p:sp>
+      <p:sp>
+        <p:nvSpPr>
+          <p:cNvPr id="42" name="Shape 13">
+            <a:extLst>
+              <a:ext uri="{FF2B5EF4-FFF2-40B4-BE49-F238E27FC236}">
+                <a16:creationId xmlns:a16="http://schemas.microsoft.com/office/drawing/2014/main" id="{4BB96F34-DE45-302F-15A6-62C502D5ACC6}"/>
+              </a:ext>
+            </a:extLst>
+          </p:cNvPr>
+          <p:cNvSpPr/>
+          <p:nvPr/>
+        </p:nvSpPr>
+        <p:spPr>
+          <a:xfrm>
+            <a:off x="811530" y="4924044"/>
+            <a:ext cx="457200" cy="457200"/>
+          </a:xfrm>
+          <a:prstGeom prst="ellipse">
+            <a:avLst/>
+          </a:prstGeom>
+          <a:solidFill>
+            <a:srgbClr val="C2663B"/>
+          </a:solidFill>
+          <a:ln/>
+        </p:spPr>
+        <p:txBody>
+          <a:bodyPr/>
+          <a:lstStyle/>
+          <a:p>
+            <a:endParaRPr lang="ko-KR" altLang="en-US"/>
+          </a:p>
+        </p:txBody>
+      </p:sp>
+      <p:sp>
+        <p:nvSpPr>
+          <p:cNvPr id="43" name="Text 14">
+            <a:extLst>
+              <a:ext uri="{FF2B5EF4-FFF2-40B4-BE49-F238E27FC236}">
+                <a16:creationId xmlns:a16="http://schemas.microsoft.com/office/drawing/2014/main" id="{A7F9A73B-B330-E3EF-8C68-760EBD323AC4}"/>
+              </a:ext>
+            </a:extLst>
+          </p:cNvPr>
+          <p:cNvSpPr/>
+          <p:nvPr/>
+        </p:nvSpPr>
+        <p:spPr>
+          <a:xfrm>
+            <a:off x="811530" y="4924044"/>
+            <a:ext cx="457200" cy="457200"/>
+          </a:xfrm>
+          <a:prstGeom prst="rect">
+            <a:avLst/>
+          </a:prstGeom>
+          <a:noFill/>
+          <a:ln/>
+        </p:spPr>
+        <p:txBody>
+          <a:bodyPr wrap="square" lIns="0" tIns="0" rIns="0" bIns="0" rtlCol="0" anchor="ctr"/>
+          <a:lstStyle/>
+          <a:p>
+            <a:pPr marL="0" indent="0" algn="ctr">
+              <a:buNone/>
+            </a:pPr>
+            <a:r>
+              <a:rPr lang="en-US" sz="1500" b="1" dirty="0">
+                <a:solidFill>
+                  <a:srgbClr val="FFFFFF"/>
+                </a:solidFill>
+                <a:latin typeface="Georgia" pitchFamily="34" charset="0"/>
+              </a:rPr>
+              <a:t>3</a:t>
+            </a:r>
+            <a:endParaRPr lang="en-US" sz="1500" dirty="0"/>
+          </a:p>
+        </p:txBody>
+      </p:sp>
+      <p:sp>
+        <p:nvSpPr>
+          <p:cNvPr id="44" name="Text 15">
+            <a:extLst>
+              <a:ext uri="{FF2B5EF4-FFF2-40B4-BE49-F238E27FC236}">
+                <a16:creationId xmlns:a16="http://schemas.microsoft.com/office/drawing/2014/main" id="{B43ACBCA-64D7-8CDA-1663-6C65DEB4D334}"/>
+              </a:ext>
+            </a:extLst>
+          </p:cNvPr>
+          <p:cNvSpPr/>
+          <p:nvPr/>
+        </p:nvSpPr>
+        <p:spPr>
+          <a:xfrm>
+            <a:off x="1433322" y="4887468"/>
+            <a:ext cx="4197096" cy="365760"/>
+          </a:xfrm>
+          <a:prstGeom prst="rect">
+            <a:avLst/>
+          </a:prstGeom>
+          <a:noFill/>
+          <a:ln/>
+        </p:spPr>
+        <p:txBody>
+          <a:bodyPr wrap="square" lIns="0" tIns="0" rIns="0" bIns="0" rtlCol="0" anchor="ctr"/>
+          <a:lstStyle/>
+          <a:p>
+            <a:pPr marL="0" indent="0" algn="l">
+              <a:buNone/>
+            </a:pPr>
+            <a:r>
+              <a:rPr lang="ko-KR" altLang="en-US" sz="1450" b="1" dirty="0">
+                <a:solidFill>
+                  <a:srgbClr val="2E3322"/>
+                </a:solidFill>
+                <a:latin typeface="Malgun Gothic" pitchFamily="34" charset="0"/>
+                <a:ea typeface="Malgun Gothic" pitchFamily="34" charset="-122"/>
+                <a:cs typeface="Malgun Gothic" pitchFamily="34" charset="-120"/>
+              </a:rPr>
+              <a:t>레시피 개선</a:t>
+            </a:r>
+            <a:endParaRPr lang="en-US" sz="1450" dirty="0"/>
+          </a:p>
+        </p:txBody>
+      </p:sp>
+      <p:sp>
+        <p:nvSpPr>
+          <p:cNvPr id="45" name="Text 16">
+            <a:extLst>
+              <a:ext uri="{FF2B5EF4-FFF2-40B4-BE49-F238E27FC236}">
+                <a16:creationId xmlns:a16="http://schemas.microsoft.com/office/drawing/2014/main" id="{2821165C-2691-88AF-B341-899A92BD8F45}"/>
+              </a:ext>
+            </a:extLst>
+          </p:cNvPr>
+          <p:cNvSpPr/>
+          <p:nvPr/>
+        </p:nvSpPr>
+        <p:spPr>
+          <a:xfrm>
+            <a:off x="1433322" y="5271516"/>
+            <a:ext cx="4151376" cy="749808"/>
+          </a:xfrm>
+          <a:prstGeom prst="rect">
+            <a:avLst/>
+          </a:prstGeom>
+          <a:noFill/>
+          <a:ln/>
+        </p:spPr>
+        <p:txBody>
+          <a:bodyPr wrap="square" lIns="0" tIns="0" rIns="0" bIns="0" rtlCol="0" anchor="t"/>
+          <a:lstStyle/>
+          <a:p>
+            <a:pPr marL="0" indent="0" algn="l">
+              <a:buNone/>
+            </a:pPr>
+            <a:r>
+              <a:rPr lang="ko-KR" altLang="en-US" sz="1200" dirty="0">
+                <a:solidFill>
+                  <a:srgbClr val="6B6A50"/>
+                </a:solidFill>
+                <a:latin typeface="Malgun Gothic" pitchFamily="34" charset="0"/>
+                <a:ea typeface="Malgun Gothic" pitchFamily="34" charset="-122"/>
+                <a:cs typeface="Malgun Gothic" pitchFamily="34" charset="-120"/>
+              </a:rPr>
+              <a:t>게임 플레이 중 레시피 아이템 드랍</a:t>
+            </a:r>
+            <a:endParaRPr lang="en-US" altLang="ko-KR" sz="1200" dirty="0">
+              <a:solidFill>
+                <a:srgbClr val="6B6A50"/>
+              </a:solidFill>
+              <a:latin typeface="Malgun Gothic" pitchFamily="34" charset="0"/>
+              <a:ea typeface="Malgun Gothic" pitchFamily="34" charset="-122"/>
+              <a:cs typeface="Malgun Gothic" pitchFamily="34" charset="-120"/>
+            </a:endParaRPr>
+          </a:p>
+          <a:p>
+            <a:pPr marL="0" indent="0" algn="l">
+              <a:buNone/>
+            </a:pPr>
+            <a:r>
+              <a:rPr lang="ko-KR" altLang="en-US" sz="1200" dirty="0">
+                <a:solidFill>
+                  <a:srgbClr val="6B6A50"/>
+                </a:solidFill>
+                <a:latin typeface="Malgun Gothic" pitchFamily="34" charset="0"/>
+                <a:ea typeface="Malgun Gothic" pitchFamily="34" charset="-122"/>
+              </a:rPr>
+              <a:t>레시피 </a:t>
+            </a:r>
+            <a:r>
+              <a:rPr lang="en-US" altLang="ko-KR" sz="1200" dirty="0">
+                <a:solidFill>
+                  <a:srgbClr val="6B6A50"/>
+                </a:solidFill>
+                <a:latin typeface="Malgun Gothic" pitchFamily="34" charset="0"/>
+                <a:ea typeface="Malgun Gothic" pitchFamily="34" charset="-122"/>
+              </a:rPr>
+              <a:t>UI </a:t>
+            </a:r>
+            <a:r>
+              <a:rPr lang="ko-KR" altLang="en-US" sz="1200" dirty="0">
+                <a:solidFill>
+                  <a:srgbClr val="6B6A50"/>
+                </a:solidFill>
+                <a:latin typeface="Malgun Gothic" pitchFamily="34" charset="0"/>
+                <a:ea typeface="Malgun Gothic" pitchFamily="34" charset="-122"/>
+              </a:rPr>
+              <a:t>개선</a:t>
+            </a:r>
+            <a:endParaRPr lang="en-US" sz="1200" dirty="0"/>
           </a:p>
         </p:txBody>
       </p:sp>
